--- a/public/lessons/year-6-maths/spring/week-12/add-fractions-with-different-denominators/teaching-powerpoint-v1.pptx
+++ b/public/lessons/year-6-maths/spring/week-12/add-fractions-with-different-denominators/teaching-powerpoint-v1.pptx
@@ -2,24 +2,24 @@
 <file path=ppt/presentation.xml><?xml version="1.0" encoding="utf-8"?>
 <p:presentation xmlns:p="http://schemas.openxmlformats.org/presentationml/2006/main">
   <p:sldMasterIdLst>
-    <p:sldMasterId xmlns:r="http://schemas.openxmlformats.org/officeDocument/2006/relationships" id="2147483648" r:id="R6d577899486d46da"/>
+    <p:sldMasterId xmlns:r="http://schemas.openxmlformats.org/officeDocument/2006/relationships" id="2147483648" r:id="Rb5323052ad9842b7"/>
   </p:sldMasterIdLst>
   <p:notesMasterIdLst>
-    <p:notesMasterId xmlns:r="http://schemas.openxmlformats.org/officeDocument/2006/relationships" r:id="Ra7705ab3a6974d45"/>
+    <p:notesMasterId xmlns:r="http://schemas.openxmlformats.org/officeDocument/2006/relationships" r:id="Reace733600b2417e"/>
   </p:notesMasterIdLst>
   <p:sldIdLst>
-    <p:sldId xmlns:r="http://schemas.openxmlformats.org/officeDocument/2006/relationships" id="256" r:id="Re00ed386a4614f6a"/>
-    <p:sldId xmlns:r="http://schemas.openxmlformats.org/officeDocument/2006/relationships" id="257" r:id="R6d2a22f4b3e24ece"/>
-    <p:sldId xmlns:r="http://schemas.openxmlformats.org/officeDocument/2006/relationships" id="258" r:id="R76123588b3c14c4b"/>
-    <p:sldId xmlns:r="http://schemas.openxmlformats.org/officeDocument/2006/relationships" id="259" r:id="Reaaf55f9a84c4de6"/>
-    <p:sldId xmlns:r="http://schemas.openxmlformats.org/officeDocument/2006/relationships" id="260" r:id="R96aca7ad4f164640"/>
-    <p:sldId xmlns:r="http://schemas.openxmlformats.org/officeDocument/2006/relationships" id="261" r:id="R37c1a05cc31744f4"/>
-    <p:sldId xmlns:r="http://schemas.openxmlformats.org/officeDocument/2006/relationships" id="262" r:id="Rda40b80dc62345bb"/>
-    <p:sldId xmlns:r="http://schemas.openxmlformats.org/officeDocument/2006/relationships" id="263" r:id="Ra9cffc7e10ef46f4"/>
-    <p:sldId xmlns:r="http://schemas.openxmlformats.org/officeDocument/2006/relationships" id="264" r:id="Re20746c85e014ec7"/>
-    <p:sldId xmlns:r="http://schemas.openxmlformats.org/officeDocument/2006/relationships" id="265" r:id="R47b51857b3364bf8"/>
-    <p:sldId xmlns:r="http://schemas.openxmlformats.org/officeDocument/2006/relationships" id="266" r:id="R6569715a3fe64f05"/>
-    <p:sldId xmlns:r="http://schemas.openxmlformats.org/officeDocument/2006/relationships" id="267" r:id="R4f49d98151d146d9"/>
+    <p:sldId xmlns:r="http://schemas.openxmlformats.org/officeDocument/2006/relationships" id="256" r:id="R0b5394d873974862"/>
+    <p:sldId xmlns:r="http://schemas.openxmlformats.org/officeDocument/2006/relationships" id="257" r:id="R6182b1c2ac904c24"/>
+    <p:sldId xmlns:r="http://schemas.openxmlformats.org/officeDocument/2006/relationships" id="258" r:id="R802d08199bda42eb"/>
+    <p:sldId xmlns:r="http://schemas.openxmlformats.org/officeDocument/2006/relationships" id="259" r:id="R7b014045ed1249b7"/>
+    <p:sldId xmlns:r="http://schemas.openxmlformats.org/officeDocument/2006/relationships" id="260" r:id="R401eaa35783e4e82"/>
+    <p:sldId xmlns:r="http://schemas.openxmlformats.org/officeDocument/2006/relationships" id="261" r:id="Rc12a0fd0a8044d45"/>
+    <p:sldId xmlns:r="http://schemas.openxmlformats.org/officeDocument/2006/relationships" id="262" r:id="Rf02660da529a4715"/>
+    <p:sldId xmlns:r="http://schemas.openxmlformats.org/officeDocument/2006/relationships" id="263" r:id="Rf74719dc6c4f45a9"/>
+    <p:sldId xmlns:r="http://schemas.openxmlformats.org/officeDocument/2006/relationships" id="264" r:id="R317460158cab42b5"/>
+    <p:sldId xmlns:r="http://schemas.openxmlformats.org/officeDocument/2006/relationships" id="265" r:id="R53bb0a283de649c0"/>
+    <p:sldId xmlns:r="http://schemas.openxmlformats.org/officeDocument/2006/relationships" id="266" r:id="Rb975e3fa990b4867"/>
+    <p:sldId xmlns:r="http://schemas.openxmlformats.org/officeDocument/2006/relationships" id="267" r:id="R5e2089975e674020"/>
   </p:sldIdLst>
   <p:sldSz cx="12192000" cy="6858000"/>
   <p:notesSz cx="6858000" cy="9144000"/>
@@ -873,7 +873,7 @@
           <a:lstStyle xmlns:a="http://schemas.openxmlformats.org/drawingml/2006/main"/>
           <a:p xmlns:a="http://schemas.openxmlformats.org/drawingml/2006/main">
             <a:r>
-              <a:t>I do. Reveal the question, setup and each calculation stage one click at a time. Pupils watch before copying. Model answer: 1 7/12.</a:t>
+              <a:t>I do. Reveal the question, then reveal each mathematical change one click at a time. Point to the numbers and operation that changed before moving to the next line. Final answer: 1 7/12.</a:t>
             </a:r>
           </a:p>
         </p:txBody>
@@ -1291,7 +1291,7 @@
   </p:cSld>
   <p:clrMap bg1="lt1" tx1="dk1" bg2="lt2" tx2="dk2" accent1="accent1" accent2="accent2" accent3="accent3" accent4="accent4" accent5="accent5" accent6="accent6" hlink="hlink" folHlink="folHlink"/>
   <p:sldLayoutIdLst>
-    <p:sldLayoutId xmlns:r="http://schemas.openxmlformats.org/officeDocument/2006/relationships" id="2147483649" r:id="Ree45b1b26e764d91"/>
+    <p:sldLayoutId xmlns:r="http://schemas.openxmlformats.org/officeDocument/2006/relationships" id="2147483649" r:id="Rbf6cdfeb64e64720"/>
   </p:sldLayoutIdLst>
   <p:txStyles>
     <p:titleStyle>
@@ -1842,7 +1842,7 @@
           <p:cNvPr id="12" name="">
             <a:extLst xmlns:a="http://schemas.openxmlformats.org/drawingml/2006/main">
               <a:ext uri="{FF2B5EF4-FFF2-40B4-BE49-F238E27FC236}">
-                <a16:creationId xmlns:a16="http://schemas.microsoft.com/office/drawing/2014/main" id="{5F085F0F-B156-4288-B4B8-628B1FE8D310}"/>
+                <a16:creationId xmlns:a16="http://schemas.microsoft.com/office/drawing/2014/main" id="{16BF73DC-572E-4485-A97E-9990A198F2FD}"/>
               </a:ext>
             </a:extLst>
           </p:cNvPr>
@@ -1874,7 +1874,7 @@
           <p:cNvPr id="2" name="">
             <a:extLst xmlns:a="http://schemas.openxmlformats.org/drawingml/2006/main">
               <a:ext uri="{FF2B5EF4-FFF2-40B4-BE49-F238E27FC236}">
-                <a16:creationId xmlns:a16="http://schemas.microsoft.com/office/drawing/2014/main" id="{B98ABAAA-4876-4205-B05B-3DF9E3A200F0}"/>
+                <a16:creationId xmlns:a16="http://schemas.microsoft.com/office/drawing/2014/main" id="{BF2A50CD-B2E9-42CD-988C-D2D172239489}"/>
               </a:ext>
             </a:extLst>
           </p:cNvPr>
@@ -1931,7 +1931,7 @@
           <p:cNvPr id="3" name="">
             <a:extLst xmlns:a="http://schemas.openxmlformats.org/drawingml/2006/main">
               <a:ext uri="{FF2B5EF4-FFF2-40B4-BE49-F238E27FC236}">
-                <a16:creationId xmlns:a16="http://schemas.microsoft.com/office/drawing/2014/main" id="{A348150D-74C5-432A-A284-CACBD2BAD3AB}"/>
+                <a16:creationId xmlns:a16="http://schemas.microsoft.com/office/drawing/2014/main" id="{01852CD6-1FB6-42E8-82E7-53B16863CB5B}"/>
               </a:ext>
             </a:extLst>
           </p:cNvPr>
@@ -1965,7 +1965,7 @@
           <p:cNvPr id="4" name="">
             <a:extLst xmlns:a="http://schemas.openxmlformats.org/drawingml/2006/main">
               <a:ext uri="{FF2B5EF4-FFF2-40B4-BE49-F238E27FC236}">
-                <a16:creationId xmlns:a16="http://schemas.microsoft.com/office/drawing/2014/main" id="{E3C050DA-1D65-440A-B3C3-A7B8CC1196AF}"/>
+                <a16:creationId xmlns:a16="http://schemas.microsoft.com/office/drawing/2014/main" id="{4EDA207C-CD47-4673-A211-F76D3EEEDCC5}"/>
               </a:ext>
             </a:extLst>
           </p:cNvPr>
@@ -2022,7 +2022,7 @@
           <p:cNvPr id="5" name="">
             <a:extLst xmlns:a="http://schemas.openxmlformats.org/drawingml/2006/main">
               <a:ext uri="{FF2B5EF4-FFF2-40B4-BE49-F238E27FC236}">
-                <a16:creationId xmlns:a16="http://schemas.microsoft.com/office/drawing/2014/main" id="{C772959C-8245-406C-AF22-BE572D21367E}"/>
+                <a16:creationId xmlns:a16="http://schemas.microsoft.com/office/drawing/2014/main" id="{8C5B3FAA-0F92-48A0-BF72-26208CFC149B}"/>
               </a:ext>
             </a:extLst>
           </p:cNvPr>
@@ -2079,7 +2079,7 @@
           <p:cNvPr id="6" name="">
             <a:extLst xmlns:a="http://schemas.openxmlformats.org/drawingml/2006/main">
               <a:ext uri="{FF2B5EF4-FFF2-40B4-BE49-F238E27FC236}">
-                <a16:creationId xmlns:a16="http://schemas.microsoft.com/office/drawing/2014/main" id="{F60064B3-A368-404E-BC39-3117408FE783}"/>
+                <a16:creationId xmlns:a16="http://schemas.microsoft.com/office/drawing/2014/main" id="{43F3BB7F-A87B-427E-A231-5AE3A23F6654}"/>
               </a:ext>
             </a:extLst>
           </p:cNvPr>
@@ -2113,7 +2113,7 @@
           <p:cNvPr id="7" name="">
             <a:extLst xmlns:a="http://schemas.openxmlformats.org/drawingml/2006/main">
               <a:ext uri="{FF2B5EF4-FFF2-40B4-BE49-F238E27FC236}">
-                <a16:creationId xmlns:a16="http://schemas.microsoft.com/office/drawing/2014/main" id="{E6869CAD-6CD7-414F-9284-6B5254975D63}"/>
+                <a16:creationId xmlns:a16="http://schemas.microsoft.com/office/drawing/2014/main" id="{F8DCF63D-8861-44E6-96A7-BBAD9F360006}"/>
               </a:ext>
             </a:extLst>
           </p:cNvPr>
@@ -2170,7 +2170,7 @@
           <p:cNvPr id="8" name="">
             <a:extLst xmlns:a="http://schemas.openxmlformats.org/drawingml/2006/main">
               <a:ext uri="{FF2B5EF4-FFF2-40B4-BE49-F238E27FC236}">
-                <a16:creationId xmlns:a16="http://schemas.microsoft.com/office/drawing/2014/main" id="{1E9156DD-97C8-4207-9CA5-7DF81AB1704A}"/>
+                <a16:creationId xmlns:a16="http://schemas.microsoft.com/office/drawing/2014/main" id="{BA73E4D5-B86D-4486-B423-3ED35EEAEF13}"/>
               </a:ext>
             </a:extLst>
           </p:cNvPr>
@@ -2227,7 +2227,7 @@
           <p:cNvPr id="9" name="">
             <a:extLst xmlns:a="http://schemas.openxmlformats.org/drawingml/2006/main">
               <a:ext uri="{FF2B5EF4-FFF2-40B4-BE49-F238E27FC236}">
-                <a16:creationId xmlns:a16="http://schemas.microsoft.com/office/drawing/2014/main" id="{7D1F7CD3-3BD8-412B-AEFC-A326284E857E}"/>
+                <a16:creationId xmlns:a16="http://schemas.microsoft.com/office/drawing/2014/main" id="{7154FCEB-360F-440F-80A4-0EB821E1F22B}"/>
               </a:ext>
             </a:extLst>
           </p:cNvPr>
@@ -2284,7 +2284,7 @@
           <p:cNvPr id="10" name="">
             <a:extLst xmlns:a="http://schemas.openxmlformats.org/drawingml/2006/main">
               <a:ext uri="{FF2B5EF4-FFF2-40B4-BE49-F238E27FC236}">
-                <a16:creationId xmlns:a16="http://schemas.microsoft.com/office/drawing/2014/main" id="{80CA7E93-1528-4E9A-8A53-4C60EB603F00}"/>
+                <a16:creationId xmlns:a16="http://schemas.microsoft.com/office/drawing/2014/main" id="{A6D25C52-6996-4961-BB45-12D35B2543E3}"/>
               </a:ext>
             </a:extLst>
           </p:cNvPr>
@@ -2341,7 +2341,7 @@
           <p:cNvPr id="11" name="">
             <a:extLst xmlns:a="http://schemas.openxmlformats.org/drawingml/2006/main">
               <a:ext uri="{FF2B5EF4-FFF2-40B4-BE49-F238E27FC236}">
-                <a16:creationId xmlns:a16="http://schemas.microsoft.com/office/drawing/2014/main" id="{723385B0-441A-4CFB-BC4E-A8CAE319330D}"/>
+                <a16:creationId xmlns:a16="http://schemas.microsoft.com/office/drawing/2014/main" id="{4C76F7E4-0615-4E9D-A0A0-26F38DA2EE87}"/>
               </a:ext>
             </a:extLst>
           </p:cNvPr>
@@ -2396,7 +2396,7 @@
     </p:spTree>
     <p:extLst>
       <p:ext uri="{BB962C8B-B14F-4D97-AF65-F5344CB8AC3E}">
-        <p14:creationId xmlns:p14="http://schemas.microsoft.com/office/powerpoint/2010/main" val="1929511006"/>
+        <p14:creationId xmlns:p14="http://schemas.microsoft.com/office/powerpoint/2010/main" val="1336934416"/>
       </p:ext>
     </p:extLst>
   </p:cSld>
@@ -2427,7 +2427,7 @@
           <p:cNvPr id="14" name="">
             <a:extLst xmlns:a="http://schemas.openxmlformats.org/drawingml/2006/main">
               <a:ext uri="{FF2B5EF4-FFF2-40B4-BE49-F238E27FC236}">
-                <a16:creationId xmlns:a16="http://schemas.microsoft.com/office/drawing/2014/main" id="{25896A41-7EBA-4CB9-9D03-88B2209C1759}"/>
+                <a16:creationId xmlns:a16="http://schemas.microsoft.com/office/drawing/2014/main" id="{DBCA3DD7-E0B2-4429-926B-F1C67FAB2CAD}"/>
               </a:ext>
             </a:extLst>
           </p:cNvPr>
@@ -2459,7 +2459,7 @@
           <p:cNvPr id="2" name="">
             <a:extLst xmlns:a="http://schemas.openxmlformats.org/drawingml/2006/main">
               <a:ext uri="{FF2B5EF4-FFF2-40B4-BE49-F238E27FC236}">
-                <a16:creationId xmlns:a16="http://schemas.microsoft.com/office/drawing/2014/main" id="{C30B0E3E-93BD-4C6C-971C-329C493C3C34}"/>
+                <a16:creationId xmlns:a16="http://schemas.microsoft.com/office/drawing/2014/main" id="{7C741F91-ADB6-4E9A-9406-51B6A1244E0F}"/>
               </a:ext>
             </a:extLst>
           </p:cNvPr>
@@ -2516,7 +2516,7 @@
           <p:cNvPr id="3" name="">
             <a:extLst xmlns:a="http://schemas.openxmlformats.org/drawingml/2006/main">
               <a:ext uri="{FF2B5EF4-FFF2-40B4-BE49-F238E27FC236}">
-                <a16:creationId xmlns:a16="http://schemas.microsoft.com/office/drawing/2014/main" id="{B6D97013-BE2A-48C3-8245-4F0A5BA9B3C8}"/>
+                <a16:creationId xmlns:a16="http://schemas.microsoft.com/office/drawing/2014/main" id="{F9D957C9-A807-4B23-8628-2477A53E4523}"/>
               </a:ext>
             </a:extLst>
           </p:cNvPr>
@@ -2548,7 +2548,7 @@
           <p:cNvPr id="4" name="">
             <a:extLst xmlns:a="http://schemas.openxmlformats.org/drawingml/2006/main">
               <a:ext uri="{FF2B5EF4-FFF2-40B4-BE49-F238E27FC236}">
-                <a16:creationId xmlns:a16="http://schemas.microsoft.com/office/drawing/2014/main" id="{36EDFEBD-93AF-4285-A427-802C76605D62}"/>
+                <a16:creationId xmlns:a16="http://schemas.microsoft.com/office/drawing/2014/main" id="{E6F4F4F0-E82C-4809-8259-08C23D05AD7C}"/>
               </a:ext>
             </a:extLst>
           </p:cNvPr>
@@ -2605,7 +2605,7 @@
           <p:cNvPr id="5" name="">
             <a:extLst xmlns:a="http://schemas.openxmlformats.org/drawingml/2006/main">
               <a:ext uri="{FF2B5EF4-FFF2-40B4-BE49-F238E27FC236}">
-                <a16:creationId xmlns:a16="http://schemas.microsoft.com/office/drawing/2014/main" id="{392EEC62-C72E-4564-A836-447FFBEF3053}"/>
+                <a16:creationId xmlns:a16="http://schemas.microsoft.com/office/drawing/2014/main" id="{59CB3C5D-2FDB-445D-A89F-3D11C8921308}"/>
               </a:ext>
             </a:extLst>
           </p:cNvPr>
@@ -2662,7 +2662,7 @@
           <p:cNvPr id="6" name="">
             <a:extLst xmlns:a="http://schemas.openxmlformats.org/drawingml/2006/main">
               <a:ext uri="{FF2B5EF4-FFF2-40B4-BE49-F238E27FC236}">
-                <a16:creationId xmlns:a16="http://schemas.microsoft.com/office/drawing/2014/main" id="{2020BA68-471F-4978-B138-F0E1A47D9F58}"/>
+                <a16:creationId xmlns:a16="http://schemas.microsoft.com/office/drawing/2014/main" id="{37FD7236-B623-46C0-997D-5D80EEA3B88F}"/>
               </a:ext>
             </a:extLst>
           </p:cNvPr>
@@ -2719,7 +2719,7 @@
           <p:cNvPr id="7" name="">
             <a:extLst xmlns:a="http://schemas.openxmlformats.org/drawingml/2006/main">
               <a:ext uri="{FF2B5EF4-FFF2-40B4-BE49-F238E27FC236}">
-                <a16:creationId xmlns:a16="http://schemas.microsoft.com/office/drawing/2014/main" id="{D5702A0E-E866-44DF-AFD4-D448B4691481}"/>
+                <a16:creationId xmlns:a16="http://schemas.microsoft.com/office/drawing/2014/main" id="{828A7659-8A3A-4888-9BF0-C285CD1C42D7}"/>
               </a:ext>
             </a:extLst>
           </p:cNvPr>
@@ -2751,7 +2751,7 @@
           <p:cNvPr id="8" name="">
             <a:extLst xmlns:a="http://schemas.openxmlformats.org/drawingml/2006/main">
               <a:ext uri="{FF2B5EF4-FFF2-40B4-BE49-F238E27FC236}">
-                <a16:creationId xmlns:a16="http://schemas.microsoft.com/office/drawing/2014/main" id="{9C28F01E-8468-4E80-8F36-D94BF8A150B1}"/>
+                <a16:creationId xmlns:a16="http://schemas.microsoft.com/office/drawing/2014/main" id="{AC5695C2-359F-496F-9028-0A390C377127}"/>
               </a:ext>
             </a:extLst>
           </p:cNvPr>
@@ -2808,7 +2808,7 @@
           <p:cNvPr id="9" name="">
             <a:extLst xmlns:a="http://schemas.openxmlformats.org/drawingml/2006/main">
               <a:ext uri="{FF2B5EF4-FFF2-40B4-BE49-F238E27FC236}">
-                <a16:creationId xmlns:a16="http://schemas.microsoft.com/office/drawing/2014/main" id="{145CF66C-DE2D-4061-8DD1-D967DDFD0103}"/>
+                <a16:creationId xmlns:a16="http://schemas.microsoft.com/office/drawing/2014/main" id="{A1D76A0B-7170-4814-B966-9CF3BF971C88}"/>
               </a:ext>
             </a:extLst>
           </p:cNvPr>
@@ -2865,7 +2865,7 @@
           <p:cNvPr id="10" name="">
             <a:extLst xmlns:a="http://schemas.openxmlformats.org/drawingml/2006/main">
               <a:ext uri="{FF2B5EF4-FFF2-40B4-BE49-F238E27FC236}">
-                <a16:creationId xmlns:a16="http://schemas.microsoft.com/office/drawing/2014/main" id="{58B6FFF4-C12E-4D4F-BB10-B6E9C6DE8B97}"/>
+                <a16:creationId xmlns:a16="http://schemas.microsoft.com/office/drawing/2014/main" id="{84287FC0-F159-43D5-9F7A-67FFC8222921}"/>
               </a:ext>
             </a:extLst>
           </p:cNvPr>
@@ -2922,7 +2922,7 @@
           <p:cNvPr id="11" name="">
             <a:extLst xmlns:a="http://schemas.openxmlformats.org/drawingml/2006/main">
               <a:ext uri="{FF2B5EF4-FFF2-40B4-BE49-F238E27FC236}">
-                <a16:creationId xmlns:a16="http://schemas.microsoft.com/office/drawing/2014/main" id="{4CC7F3E4-81D6-4E2A-BA74-C702EDC29FDC}"/>
+                <a16:creationId xmlns:a16="http://schemas.microsoft.com/office/drawing/2014/main" id="{CC859628-25BA-4ACF-B663-9464BDEB9EA7}"/>
               </a:ext>
             </a:extLst>
           </p:cNvPr>
@@ -2979,7 +2979,7 @@
           <p:cNvPr id="12" name="">
             <a:extLst xmlns:a="http://schemas.openxmlformats.org/drawingml/2006/main">
               <a:ext uri="{FF2B5EF4-FFF2-40B4-BE49-F238E27FC236}">
-                <a16:creationId xmlns:a16="http://schemas.microsoft.com/office/drawing/2014/main" id="{23A05988-2EF0-4DB4-A4DC-454CAE5FA899}"/>
+                <a16:creationId xmlns:a16="http://schemas.microsoft.com/office/drawing/2014/main" id="{D23D075B-BC6C-4427-9070-C36968D14243}"/>
               </a:ext>
             </a:extLst>
           </p:cNvPr>
@@ -3036,7 +3036,7 @@
           <p:cNvPr id="13" name="">
             <a:extLst xmlns:a="http://schemas.openxmlformats.org/drawingml/2006/main">
               <a:ext uri="{FF2B5EF4-FFF2-40B4-BE49-F238E27FC236}">
-                <a16:creationId xmlns:a16="http://schemas.microsoft.com/office/drawing/2014/main" id="{24BF2CA1-B498-402D-91FC-F57005A4E33C}"/>
+                <a16:creationId xmlns:a16="http://schemas.microsoft.com/office/drawing/2014/main" id="{E9E6D54E-BC37-4874-B96B-F7DFD6768303}"/>
               </a:ext>
             </a:extLst>
           </p:cNvPr>
@@ -3091,7 +3091,7 @@
     </p:spTree>
     <p:extLst>
       <p:ext uri="{BB962C8B-B14F-4D97-AF65-F5344CB8AC3E}">
-        <p14:creationId xmlns:p14="http://schemas.microsoft.com/office/powerpoint/2010/main" val="1253274432"/>
+        <p14:creationId xmlns:p14="http://schemas.microsoft.com/office/powerpoint/2010/main" val="1348557914"/>
       </p:ext>
     </p:extLst>
   </p:cSld>
@@ -3292,7 +3292,7 @@
           <p:cNvPr id="19" name="">
             <a:extLst xmlns:a="http://schemas.openxmlformats.org/drawingml/2006/main">
               <a:ext uri="{FF2B5EF4-FFF2-40B4-BE49-F238E27FC236}">
-                <a16:creationId xmlns:a16="http://schemas.microsoft.com/office/drawing/2014/main" id="{06108C28-E34B-47EE-9AC4-967FE5942CB0}"/>
+                <a16:creationId xmlns:a16="http://schemas.microsoft.com/office/drawing/2014/main" id="{BE50FB93-8AA5-448E-9381-A551F62CC2F2}"/>
               </a:ext>
             </a:extLst>
           </p:cNvPr>
@@ -3324,7 +3324,7 @@
           <p:cNvPr id="2" name="">
             <a:extLst xmlns:a="http://schemas.openxmlformats.org/drawingml/2006/main">
               <a:ext uri="{FF2B5EF4-FFF2-40B4-BE49-F238E27FC236}">
-                <a16:creationId xmlns:a16="http://schemas.microsoft.com/office/drawing/2014/main" id="{D437295A-06C9-49AF-9235-AA69EA54A224}"/>
+                <a16:creationId xmlns:a16="http://schemas.microsoft.com/office/drawing/2014/main" id="{5240384C-38B9-411E-9B94-C6B0287F200B}"/>
               </a:ext>
             </a:extLst>
           </p:cNvPr>
@@ -3381,7 +3381,7 @@
           <p:cNvPr id="3" name="">
             <a:extLst xmlns:a="http://schemas.openxmlformats.org/drawingml/2006/main">
               <a:ext uri="{FF2B5EF4-FFF2-40B4-BE49-F238E27FC236}">
-                <a16:creationId xmlns:a16="http://schemas.microsoft.com/office/drawing/2014/main" id="{E5CAEE5B-9826-4405-9531-A01B81BBE405}"/>
+                <a16:creationId xmlns:a16="http://schemas.microsoft.com/office/drawing/2014/main" id="{F48904A7-F942-4466-B84A-A078A24C2172}"/>
               </a:ext>
             </a:extLst>
           </p:cNvPr>
@@ -3413,7 +3413,7 @@
           <p:cNvPr id="4" name="">
             <a:extLst xmlns:a="http://schemas.openxmlformats.org/drawingml/2006/main">
               <a:ext uri="{FF2B5EF4-FFF2-40B4-BE49-F238E27FC236}">
-                <a16:creationId xmlns:a16="http://schemas.microsoft.com/office/drawing/2014/main" id="{45CF1F00-6538-4425-8104-4C962A77E807}"/>
+                <a16:creationId xmlns:a16="http://schemas.microsoft.com/office/drawing/2014/main" id="{2B925F4F-10C9-4C6A-8045-ED1C5E8E5CFA}"/>
               </a:ext>
             </a:extLst>
           </p:cNvPr>
@@ -3470,7 +3470,7 @@
           <p:cNvPr id="5" name="">
             <a:extLst xmlns:a="http://schemas.openxmlformats.org/drawingml/2006/main">
               <a:ext uri="{FF2B5EF4-FFF2-40B4-BE49-F238E27FC236}">
-                <a16:creationId xmlns:a16="http://schemas.microsoft.com/office/drawing/2014/main" id="{84EB8B9A-91AC-43D1-A8E3-6A70A6041E1F}"/>
+                <a16:creationId xmlns:a16="http://schemas.microsoft.com/office/drawing/2014/main" id="{B2A77745-262B-4CFF-BF3D-9D2260B4E0A4}"/>
               </a:ext>
             </a:extLst>
           </p:cNvPr>
@@ -3527,7 +3527,7 @@
           <p:cNvPr id="6" name="">
             <a:extLst xmlns:a="http://schemas.openxmlformats.org/drawingml/2006/main">
               <a:ext uri="{FF2B5EF4-FFF2-40B4-BE49-F238E27FC236}">
-                <a16:creationId xmlns:a16="http://schemas.microsoft.com/office/drawing/2014/main" id="{733B3A6F-D2A7-4F1D-84EE-3925B2F13C66}"/>
+                <a16:creationId xmlns:a16="http://schemas.microsoft.com/office/drawing/2014/main" id="{160A8BC1-1A2F-421C-8A25-4B579A8296E2}"/>
               </a:ext>
             </a:extLst>
           </p:cNvPr>
@@ -3584,7 +3584,7 @@
           <p:cNvPr id="7" name="">
             <a:extLst xmlns:a="http://schemas.openxmlformats.org/drawingml/2006/main">
               <a:ext uri="{FF2B5EF4-FFF2-40B4-BE49-F238E27FC236}">
-                <a16:creationId xmlns:a16="http://schemas.microsoft.com/office/drawing/2014/main" id="{75BCD143-49FE-44ED-B18E-8A88C94E0248}"/>
+                <a16:creationId xmlns:a16="http://schemas.microsoft.com/office/drawing/2014/main" id="{957DD657-10FB-4994-AE32-574EE4B15541}"/>
               </a:ext>
             </a:extLst>
           </p:cNvPr>
@@ -3616,7 +3616,7 @@
           <p:cNvPr id="8" name="">
             <a:extLst xmlns:a="http://schemas.openxmlformats.org/drawingml/2006/main">
               <a:ext uri="{FF2B5EF4-FFF2-40B4-BE49-F238E27FC236}">
-                <a16:creationId xmlns:a16="http://schemas.microsoft.com/office/drawing/2014/main" id="{A4C30006-3DE8-4C70-8047-3D57BF1FB4C1}"/>
+                <a16:creationId xmlns:a16="http://schemas.microsoft.com/office/drawing/2014/main" id="{AB82C533-10D2-4472-B569-09307246F64A}"/>
               </a:ext>
             </a:extLst>
           </p:cNvPr>
@@ -3673,7 +3673,7 @@
           <p:cNvPr id="9" name="">
             <a:extLst xmlns:a="http://schemas.openxmlformats.org/drawingml/2006/main">
               <a:ext uri="{FF2B5EF4-FFF2-40B4-BE49-F238E27FC236}">
-                <a16:creationId xmlns:a16="http://schemas.microsoft.com/office/drawing/2014/main" id="{86F80D25-01BC-4772-85E7-33FDE718E5CD}"/>
+                <a16:creationId xmlns:a16="http://schemas.microsoft.com/office/drawing/2014/main" id="{4B2D90BF-E7F7-458E-A044-AD9D1A80B913}"/>
               </a:ext>
             </a:extLst>
           </p:cNvPr>
@@ -3730,7 +3730,7 @@
           <p:cNvPr id="10" name="">
             <a:extLst xmlns:a="http://schemas.openxmlformats.org/drawingml/2006/main">
               <a:ext uri="{FF2B5EF4-FFF2-40B4-BE49-F238E27FC236}">
-                <a16:creationId xmlns:a16="http://schemas.microsoft.com/office/drawing/2014/main" id="{AF37E1FF-260E-4980-8335-8083DFFEF2B8}"/>
+                <a16:creationId xmlns:a16="http://schemas.microsoft.com/office/drawing/2014/main" id="{BD6D7BE3-AD73-46C8-99DD-83133BE89A97}"/>
               </a:ext>
             </a:extLst>
           </p:cNvPr>
@@ -3787,7 +3787,7 @@
           <p:cNvPr id="11" name="">
             <a:extLst xmlns:a="http://schemas.openxmlformats.org/drawingml/2006/main">
               <a:ext uri="{FF2B5EF4-FFF2-40B4-BE49-F238E27FC236}">
-                <a16:creationId xmlns:a16="http://schemas.microsoft.com/office/drawing/2014/main" id="{E0D8D679-D7BB-4236-8584-D07D0EF2F55C}"/>
+                <a16:creationId xmlns:a16="http://schemas.microsoft.com/office/drawing/2014/main" id="{6CEEA97E-65EA-43DF-820B-D9B9ED54B3C6}"/>
               </a:ext>
             </a:extLst>
           </p:cNvPr>
@@ -3821,7 +3821,7 @@
           <p:cNvPr id="12" name="">
             <a:extLst xmlns:a="http://schemas.openxmlformats.org/drawingml/2006/main">
               <a:ext uri="{FF2B5EF4-FFF2-40B4-BE49-F238E27FC236}">
-                <a16:creationId xmlns:a16="http://schemas.microsoft.com/office/drawing/2014/main" id="{7F70976B-25B6-40E5-AE59-513B54CD0D32}"/>
+                <a16:creationId xmlns:a16="http://schemas.microsoft.com/office/drawing/2014/main" id="{46C4BA0F-53FD-42C8-BDDB-D124DDFC02D0}"/>
               </a:ext>
             </a:extLst>
           </p:cNvPr>
@@ -3878,7 +3878,7 @@
           <p:cNvPr id="13" name="">
             <a:extLst xmlns:a="http://schemas.openxmlformats.org/drawingml/2006/main">
               <a:ext uri="{FF2B5EF4-FFF2-40B4-BE49-F238E27FC236}">
-                <a16:creationId xmlns:a16="http://schemas.microsoft.com/office/drawing/2014/main" id="{BEE8B424-4AFF-42B2-BFBF-A3D514F479C5}"/>
+                <a16:creationId xmlns:a16="http://schemas.microsoft.com/office/drawing/2014/main" id="{37488F9E-8A54-4E2D-B150-223FCA435428}"/>
               </a:ext>
             </a:extLst>
           </p:cNvPr>
@@ -3935,7 +3935,7 @@
           <p:cNvPr id="14" name="">
             <a:extLst xmlns:a="http://schemas.openxmlformats.org/drawingml/2006/main">
               <a:ext uri="{FF2B5EF4-FFF2-40B4-BE49-F238E27FC236}">
-                <a16:creationId xmlns:a16="http://schemas.microsoft.com/office/drawing/2014/main" id="{A1C62F6B-3425-4E68-904A-31A82126B863}"/>
+                <a16:creationId xmlns:a16="http://schemas.microsoft.com/office/drawing/2014/main" id="{12BB04A1-8554-42B6-A350-BD99A8470A47}"/>
               </a:ext>
             </a:extLst>
           </p:cNvPr>
@@ -3992,7 +3992,7 @@
           <p:cNvPr id="15" name="">
             <a:extLst xmlns:a="http://schemas.openxmlformats.org/drawingml/2006/main">
               <a:ext uri="{FF2B5EF4-FFF2-40B4-BE49-F238E27FC236}">
-                <a16:creationId xmlns:a16="http://schemas.microsoft.com/office/drawing/2014/main" id="{6E4400D5-23B7-4FA2-8752-8C31473029DE}"/>
+                <a16:creationId xmlns:a16="http://schemas.microsoft.com/office/drawing/2014/main" id="{278A438A-3EDF-4B76-BD78-FCF72D79D7B0}"/>
               </a:ext>
             </a:extLst>
           </p:cNvPr>
@@ -4026,7 +4026,7 @@
           <p:cNvPr id="16" name="">
             <a:extLst xmlns:a="http://schemas.openxmlformats.org/drawingml/2006/main">
               <a:ext uri="{FF2B5EF4-FFF2-40B4-BE49-F238E27FC236}">
-                <a16:creationId xmlns:a16="http://schemas.microsoft.com/office/drawing/2014/main" id="{5079FF7C-CB32-44EB-8287-FC2D304226C0}"/>
+                <a16:creationId xmlns:a16="http://schemas.microsoft.com/office/drawing/2014/main" id="{E3338392-970D-4B37-AF6E-26888EC8015E}"/>
               </a:ext>
             </a:extLst>
           </p:cNvPr>
@@ -4083,7 +4083,7 @@
           <p:cNvPr id="17" name="">
             <a:extLst xmlns:a="http://schemas.openxmlformats.org/drawingml/2006/main">
               <a:ext uri="{FF2B5EF4-FFF2-40B4-BE49-F238E27FC236}">
-                <a16:creationId xmlns:a16="http://schemas.microsoft.com/office/drawing/2014/main" id="{438B4D11-188C-482E-B8F6-92CA775F2625}"/>
+                <a16:creationId xmlns:a16="http://schemas.microsoft.com/office/drawing/2014/main" id="{EC68EB78-423D-4736-AE49-89899402E12E}"/>
               </a:ext>
             </a:extLst>
           </p:cNvPr>
@@ -4140,7 +4140,7 @@
           <p:cNvPr id="18" name="">
             <a:extLst xmlns:a="http://schemas.openxmlformats.org/drawingml/2006/main">
               <a:ext uri="{FF2B5EF4-FFF2-40B4-BE49-F238E27FC236}">
-                <a16:creationId xmlns:a16="http://schemas.microsoft.com/office/drawing/2014/main" id="{64A309B3-2A04-4B5E-9608-0DF83F94DC56}"/>
+                <a16:creationId xmlns:a16="http://schemas.microsoft.com/office/drawing/2014/main" id="{C17E46C0-1766-4A06-92AD-86CE96E3A9D4}"/>
               </a:ext>
             </a:extLst>
           </p:cNvPr>
@@ -4195,7 +4195,7 @@
     </p:spTree>
     <p:extLst>
       <p:ext uri="{BB962C8B-B14F-4D97-AF65-F5344CB8AC3E}">
-        <p14:creationId xmlns:p14="http://schemas.microsoft.com/office/powerpoint/2010/main" val="1873602203"/>
+        <p14:creationId xmlns:p14="http://schemas.microsoft.com/office/powerpoint/2010/main" val="1333947941"/>
       </p:ext>
     </p:extLst>
   </p:cSld>
@@ -4350,7 +4350,7 @@
           <p:cNvPr id="23" name="">
             <a:extLst xmlns:a="http://schemas.openxmlformats.org/drawingml/2006/main">
               <a:ext uri="{FF2B5EF4-FFF2-40B4-BE49-F238E27FC236}">
-                <a16:creationId xmlns:a16="http://schemas.microsoft.com/office/drawing/2014/main" id="{F20D0666-881F-4D69-A605-7A0546FF2647}"/>
+                <a16:creationId xmlns:a16="http://schemas.microsoft.com/office/drawing/2014/main" id="{FBC7709B-1F51-4759-856E-765FB3C042BA}"/>
               </a:ext>
             </a:extLst>
           </p:cNvPr>
@@ -4382,7 +4382,7 @@
           <p:cNvPr id="2" name="">
             <a:extLst xmlns:a="http://schemas.openxmlformats.org/drawingml/2006/main">
               <a:ext uri="{FF2B5EF4-FFF2-40B4-BE49-F238E27FC236}">
-                <a16:creationId xmlns:a16="http://schemas.microsoft.com/office/drawing/2014/main" id="{2D9CEFDB-9D0D-4242-8B07-86394FE2F38B}"/>
+                <a16:creationId xmlns:a16="http://schemas.microsoft.com/office/drawing/2014/main" id="{4241CD15-E9CE-462B-9C92-874B16172A7B}"/>
               </a:ext>
             </a:extLst>
           </p:cNvPr>
@@ -4439,7 +4439,7 @@
           <p:cNvPr id="3" name="">
             <a:extLst xmlns:a="http://schemas.openxmlformats.org/drawingml/2006/main">
               <a:ext uri="{FF2B5EF4-FFF2-40B4-BE49-F238E27FC236}">
-                <a16:creationId xmlns:a16="http://schemas.microsoft.com/office/drawing/2014/main" id="{8E961B82-0049-4542-8E66-114B6EA290BE}"/>
+                <a16:creationId xmlns:a16="http://schemas.microsoft.com/office/drawing/2014/main" id="{6907813C-4E49-4E7A-B659-27EC5D291F10}"/>
               </a:ext>
             </a:extLst>
           </p:cNvPr>
@@ -4471,7 +4471,7 @@
           <p:cNvPr id="4" name="">
             <a:extLst xmlns:a="http://schemas.openxmlformats.org/drawingml/2006/main">
               <a:ext uri="{FF2B5EF4-FFF2-40B4-BE49-F238E27FC236}">
-                <a16:creationId xmlns:a16="http://schemas.microsoft.com/office/drawing/2014/main" id="{CBB1AAC2-4C5B-46AC-AD36-05EBC7A348FB}"/>
+                <a16:creationId xmlns:a16="http://schemas.microsoft.com/office/drawing/2014/main" id="{8598A988-93CE-435C-96E0-286C27A9E75B}"/>
               </a:ext>
             </a:extLst>
           </p:cNvPr>
@@ -4528,7 +4528,7 @@
           <p:cNvPr id="5" name="">
             <a:extLst xmlns:a="http://schemas.openxmlformats.org/drawingml/2006/main">
               <a:ext uri="{FF2B5EF4-FFF2-40B4-BE49-F238E27FC236}">
-                <a16:creationId xmlns:a16="http://schemas.microsoft.com/office/drawing/2014/main" id="{0BBEE813-B82B-4DBD-92A7-9831F758112B}"/>
+                <a16:creationId xmlns:a16="http://schemas.microsoft.com/office/drawing/2014/main" id="{D07B69DE-BB74-4297-89CD-AE9BD9233EE0}"/>
               </a:ext>
             </a:extLst>
           </p:cNvPr>
@@ -4585,7 +4585,7 @@
           <p:cNvPr id="6" name="">
             <a:extLst xmlns:a="http://schemas.openxmlformats.org/drawingml/2006/main">
               <a:ext uri="{FF2B5EF4-FFF2-40B4-BE49-F238E27FC236}">
-                <a16:creationId xmlns:a16="http://schemas.microsoft.com/office/drawing/2014/main" id="{53F10C24-A11A-4677-91CD-B710CA35BEC0}"/>
+                <a16:creationId xmlns:a16="http://schemas.microsoft.com/office/drawing/2014/main" id="{9B827298-0778-4539-9E76-CA52C4376728}"/>
               </a:ext>
             </a:extLst>
           </p:cNvPr>
@@ -4642,7 +4642,7 @@
           <p:cNvPr id="7" name="">
             <a:extLst xmlns:a="http://schemas.openxmlformats.org/drawingml/2006/main">
               <a:ext uri="{FF2B5EF4-FFF2-40B4-BE49-F238E27FC236}">
-                <a16:creationId xmlns:a16="http://schemas.microsoft.com/office/drawing/2014/main" id="{CC6F4419-A9CB-43EE-8FBA-ABE499A4623B}"/>
+                <a16:creationId xmlns:a16="http://schemas.microsoft.com/office/drawing/2014/main" id="{653C5EA9-5335-435D-B47A-FE0F4F7840B6}"/>
               </a:ext>
             </a:extLst>
           </p:cNvPr>
@@ -4674,7 +4674,7 @@
           <p:cNvPr id="8" name="">
             <a:extLst xmlns:a="http://schemas.openxmlformats.org/drawingml/2006/main">
               <a:ext uri="{FF2B5EF4-FFF2-40B4-BE49-F238E27FC236}">
-                <a16:creationId xmlns:a16="http://schemas.microsoft.com/office/drawing/2014/main" id="{FF0E7060-F971-4679-B76D-B27B25817BEA}"/>
+                <a16:creationId xmlns:a16="http://schemas.microsoft.com/office/drawing/2014/main" id="{831383B6-F2FF-4573-9EDE-BC1AA10ED71E}"/>
               </a:ext>
             </a:extLst>
           </p:cNvPr>
@@ -4731,7 +4731,7 @@
           <p:cNvPr id="9" name="">
             <a:extLst xmlns:a="http://schemas.openxmlformats.org/drawingml/2006/main">
               <a:ext uri="{FF2B5EF4-FFF2-40B4-BE49-F238E27FC236}">
-                <a16:creationId xmlns:a16="http://schemas.microsoft.com/office/drawing/2014/main" id="{04450262-2851-4CD9-B46B-D7F358F19B05}"/>
+                <a16:creationId xmlns:a16="http://schemas.microsoft.com/office/drawing/2014/main" id="{D35C8EB4-77FE-46E6-AD0D-76412ABE8406}"/>
               </a:ext>
             </a:extLst>
           </p:cNvPr>
@@ -4788,7 +4788,7 @@
           <p:cNvPr id="10" name="">
             <a:extLst xmlns:a="http://schemas.openxmlformats.org/drawingml/2006/main">
               <a:ext uri="{FF2B5EF4-FFF2-40B4-BE49-F238E27FC236}">
-                <a16:creationId xmlns:a16="http://schemas.microsoft.com/office/drawing/2014/main" id="{0E0272E4-5543-4661-9CBD-518EA9CD91AC}"/>
+                <a16:creationId xmlns:a16="http://schemas.microsoft.com/office/drawing/2014/main" id="{8748938A-6C97-4E64-B783-41107BB7CCE2}"/>
               </a:ext>
             </a:extLst>
           </p:cNvPr>
@@ -4822,7 +4822,7 @@
           <p:cNvPr id="11" name="">
             <a:extLst xmlns:a="http://schemas.openxmlformats.org/drawingml/2006/main">
               <a:ext uri="{FF2B5EF4-FFF2-40B4-BE49-F238E27FC236}">
-                <a16:creationId xmlns:a16="http://schemas.microsoft.com/office/drawing/2014/main" id="{0D884E0C-B55D-4273-84D2-3AA71B6927BC}"/>
+                <a16:creationId xmlns:a16="http://schemas.microsoft.com/office/drawing/2014/main" id="{0CDC4D27-C690-45AF-A6D8-B68A23CEABF4}"/>
               </a:ext>
             </a:extLst>
           </p:cNvPr>
@@ -4854,7 +4854,7 @@
           <p:cNvPr id="12" name="">
             <a:extLst xmlns:a="http://schemas.openxmlformats.org/drawingml/2006/main">
               <a:ext uri="{FF2B5EF4-FFF2-40B4-BE49-F238E27FC236}">
-                <a16:creationId xmlns:a16="http://schemas.microsoft.com/office/drawing/2014/main" id="{F3A1D7CF-24B6-4C51-9C2F-B45A44E8510C}"/>
+                <a16:creationId xmlns:a16="http://schemas.microsoft.com/office/drawing/2014/main" id="{5C6EED4D-3C52-4C15-800B-F9727C5EA14D}"/>
               </a:ext>
             </a:extLst>
           </p:cNvPr>
@@ -4911,7 +4911,7 @@
           <p:cNvPr id="13" name="">
             <a:extLst xmlns:a="http://schemas.openxmlformats.org/drawingml/2006/main">
               <a:ext uri="{FF2B5EF4-FFF2-40B4-BE49-F238E27FC236}">
-                <a16:creationId xmlns:a16="http://schemas.microsoft.com/office/drawing/2014/main" id="{D4096394-95A1-4E7B-A11F-CE4F1324D906}"/>
+                <a16:creationId xmlns:a16="http://schemas.microsoft.com/office/drawing/2014/main" id="{FFE1AF5E-FF01-41F2-A5AD-CE02AA1DFB43}"/>
               </a:ext>
             </a:extLst>
           </p:cNvPr>
@@ -4968,7 +4968,7 @@
           <p:cNvPr id="14" name="">
             <a:extLst xmlns:a="http://schemas.openxmlformats.org/drawingml/2006/main">
               <a:ext uri="{FF2B5EF4-FFF2-40B4-BE49-F238E27FC236}">
-                <a16:creationId xmlns:a16="http://schemas.microsoft.com/office/drawing/2014/main" id="{8DA9FC09-07EE-40AA-B641-0A53220ADD17}"/>
+                <a16:creationId xmlns:a16="http://schemas.microsoft.com/office/drawing/2014/main" id="{95455D7E-4645-4F98-A38F-E987681E30C6}"/>
               </a:ext>
             </a:extLst>
           </p:cNvPr>
@@ -5002,7 +5002,7 @@
           <p:cNvPr id="15" name="">
             <a:extLst xmlns:a="http://schemas.openxmlformats.org/drawingml/2006/main">
               <a:ext uri="{FF2B5EF4-FFF2-40B4-BE49-F238E27FC236}">
-                <a16:creationId xmlns:a16="http://schemas.microsoft.com/office/drawing/2014/main" id="{9E34FB53-440E-4E10-8B92-E663C3CF4C44}"/>
+                <a16:creationId xmlns:a16="http://schemas.microsoft.com/office/drawing/2014/main" id="{D321081D-126D-4ABA-8DF2-BDAC7C8BC5D6}"/>
               </a:ext>
             </a:extLst>
           </p:cNvPr>
@@ -5034,7 +5034,7 @@
           <p:cNvPr id="16" name="">
             <a:extLst xmlns:a="http://schemas.openxmlformats.org/drawingml/2006/main">
               <a:ext uri="{FF2B5EF4-FFF2-40B4-BE49-F238E27FC236}">
-                <a16:creationId xmlns:a16="http://schemas.microsoft.com/office/drawing/2014/main" id="{6C7AFE14-46AB-41D3-BADF-D5BA09C14C2D}"/>
+                <a16:creationId xmlns:a16="http://schemas.microsoft.com/office/drawing/2014/main" id="{3C0C30CC-CC12-4D59-BFA0-A61B46BB4475}"/>
               </a:ext>
             </a:extLst>
           </p:cNvPr>
@@ -5091,7 +5091,7 @@
           <p:cNvPr id="17" name="">
             <a:extLst xmlns:a="http://schemas.openxmlformats.org/drawingml/2006/main">
               <a:ext uri="{FF2B5EF4-FFF2-40B4-BE49-F238E27FC236}">
-                <a16:creationId xmlns:a16="http://schemas.microsoft.com/office/drawing/2014/main" id="{B4E3DA39-C1A4-4B51-BCF3-A71F8E5E8859}"/>
+                <a16:creationId xmlns:a16="http://schemas.microsoft.com/office/drawing/2014/main" id="{A671CA85-5677-4249-8F3B-C369AA1CE195}"/>
               </a:ext>
             </a:extLst>
           </p:cNvPr>
@@ -5148,7 +5148,7 @@
           <p:cNvPr id="18" name="">
             <a:extLst xmlns:a="http://schemas.openxmlformats.org/drawingml/2006/main">
               <a:ext uri="{FF2B5EF4-FFF2-40B4-BE49-F238E27FC236}">
-                <a16:creationId xmlns:a16="http://schemas.microsoft.com/office/drawing/2014/main" id="{A001168F-F8FE-41EA-B06B-AF617BA64E35}"/>
+                <a16:creationId xmlns:a16="http://schemas.microsoft.com/office/drawing/2014/main" id="{009BC9DC-2F89-4693-9656-CE1234A49CE3}"/>
               </a:ext>
             </a:extLst>
           </p:cNvPr>
@@ -5182,7 +5182,7 @@
           <p:cNvPr id="19" name="">
             <a:extLst xmlns:a="http://schemas.openxmlformats.org/drawingml/2006/main">
               <a:ext uri="{FF2B5EF4-FFF2-40B4-BE49-F238E27FC236}">
-                <a16:creationId xmlns:a16="http://schemas.microsoft.com/office/drawing/2014/main" id="{77B16439-EDBD-4B89-BC0F-05726D426387}"/>
+                <a16:creationId xmlns:a16="http://schemas.microsoft.com/office/drawing/2014/main" id="{256B47A4-3E2E-480F-A4FB-F0FF6F9B9452}"/>
               </a:ext>
             </a:extLst>
           </p:cNvPr>
@@ -5214,7 +5214,7 @@
           <p:cNvPr id="20" name="">
             <a:extLst xmlns:a="http://schemas.openxmlformats.org/drawingml/2006/main">
               <a:ext uri="{FF2B5EF4-FFF2-40B4-BE49-F238E27FC236}">
-                <a16:creationId xmlns:a16="http://schemas.microsoft.com/office/drawing/2014/main" id="{9C729B41-9DDE-48AB-A168-7A0EBBC28EE4}"/>
+                <a16:creationId xmlns:a16="http://schemas.microsoft.com/office/drawing/2014/main" id="{E5419FEC-E49C-480E-8D6C-5B432939E62F}"/>
               </a:ext>
             </a:extLst>
           </p:cNvPr>
@@ -5271,7 +5271,7 @@
           <p:cNvPr id="21" name="">
             <a:extLst xmlns:a="http://schemas.openxmlformats.org/drawingml/2006/main">
               <a:ext uri="{FF2B5EF4-FFF2-40B4-BE49-F238E27FC236}">
-                <a16:creationId xmlns:a16="http://schemas.microsoft.com/office/drawing/2014/main" id="{B440CE78-E020-40FF-86F5-7B5EA883EA1B}"/>
+                <a16:creationId xmlns:a16="http://schemas.microsoft.com/office/drawing/2014/main" id="{E22B655F-91C5-4E2B-BAC9-9B04399847EB}"/>
               </a:ext>
             </a:extLst>
           </p:cNvPr>
@@ -5328,7 +5328,7 @@
           <p:cNvPr id="22" name="">
             <a:extLst xmlns:a="http://schemas.openxmlformats.org/drawingml/2006/main">
               <a:ext uri="{FF2B5EF4-FFF2-40B4-BE49-F238E27FC236}">
-                <a16:creationId xmlns:a16="http://schemas.microsoft.com/office/drawing/2014/main" id="{88D1A236-1B71-43D8-9D23-D50813624CBC}"/>
+                <a16:creationId xmlns:a16="http://schemas.microsoft.com/office/drawing/2014/main" id="{1E7C6DFB-3C3E-437E-AC2F-2BE5E813E509}"/>
               </a:ext>
             </a:extLst>
           </p:cNvPr>
@@ -5383,7 +5383,7 @@
     </p:spTree>
     <p:extLst>
       <p:ext uri="{BB962C8B-B14F-4D97-AF65-F5344CB8AC3E}">
-        <p14:creationId xmlns:p14="http://schemas.microsoft.com/office/powerpoint/2010/main" val="1613586569"/>
+        <p14:creationId xmlns:p14="http://schemas.microsoft.com/office/powerpoint/2010/main" val="1464909968"/>
       </p:ext>
     </p:extLst>
   </p:cSld>
@@ -5584,7 +5584,7 @@
           <p:cNvPr id="23" name="">
             <a:extLst xmlns:a="http://schemas.openxmlformats.org/drawingml/2006/main">
               <a:ext uri="{FF2B5EF4-FFF2-40B4-BE49-F238E27FC236}">
-                <a16:creationId xmlns:a16="http://schemas.microsoft.com/office/drawing/2014/main" id="{B54E14D0-8879-4D39-A797-D71B48536B09}"/>
+                <a16:creationId xmlns:a16="http://schemas.microsoft.com/office/drawing/2014/main" id="{71EE6633-2F88-464B-AEC2-686F7FC072E7}"/>
               </a:ext>
             </a:extLst>
           </p:cNvPr>
@@ -5616,7 +5616,7 @@
           <p:cNvPr id="2" name="">
             <a:extLst xmlns:a="http://schemas.openxmlformats.org/drawingml/2006/main">
               <a:ext uri="{FF2B5EF4-FFF2-40B4-BE49-F238E27FC236}">
-                <a16:creationId xmlns:a16="http://schemas.microsoft.com/office/drawing/2014/main" id="{F228A964-6451-47E3-8E8C-2FE90C50FBDF}"/>
+                <a16:creationId xmlns:a16="http://schemas.microsoft.com/office/drawing/2014/main" id="{A681E745-F146-4561-A816-D6AB2167CDCE}"/>
               </a:ext>
             </a:extLst>
           </p:cNvPr>
@@ -5673,7 +5673,7 @@
           <p:cNvPr id="3" name="">
             <a:extLst xmlns:a="http://schemas.openxmlformats.org/drawingml/2006/main">
               <a:ext uri="{FF2B5EF4-FFF2-40B4-BE49-F238E27FC236}">
-                <a16:creationId xmlns:a16="http://schemas.microsoft.com/office/drawing/2014/main" id="{44E71FD9-F1AB-4817-A7AD-BE77D358D290}"/>
+                <a16:creationId xmlns:a16="http://schemas.microsoft.com/office/drawing/2014/main" id="{E5AAD186-B9A2-4FF8-9C73-ADC733874593}"/>
               </a:ext>
             </a:extLst>
           </p:cNvPr>
@@ -5705,7 +5705,7 @@
           <p:cNvPr id="4" name="">
             <a:extLst xmlns:a="http://schemas.openxmlformats.org/drawingml/2006/main">
               <a:ext uri="{FF2B5EF4-FFF2-40B4-BE49-F238E27FC236}">
-                <a16:creationId xmlns:a16="http://schemas.microsoft.com/office/drawing/2014/main" id="{7FB0857E-983F-479D-BFDE-5358D2B11670}"/>
+                <a16:creationId xmlns:a16="http://schemas.microsoft.com/office/drawing/2014/main" id="{9AD45DAD-D96C-40BE-A379-77685EEC63B3}"/>
               </a:ext>
             </a:extLst>
           </p:cNvPr>
@@ -5762,7 +5762,7 @@
           <p:cNvPr id="5" name="">
             <a:extLst xmlns:a="http://schemas.openxmlformats.org/drawingml/2006/main">
               <a:ext uri="{FF2B5EF4-FFF2-40B4-BE49-F238E27FC236}">
-                <a16:creationId xmlns:a16="http://schemas.microsoft.com/office/drawing/2014/main" id="{5D4C8540-6A5D-457E-A9F2-A43C9F185F1C}"/>
+                <a16:creationId xmlns:a16="http://schemas.microsoft.com/office/drawing/2014/main" id="{7CE8C5AE-0A77-42D8-8A51-4BC2D83D0E8B}"/>
               </a:ext>
             </a:extLst>
           </p:cNvPr>
@@ -5819,7 +5819,7 @@
           <p:cNvPr id="6" name="">
             <a:extLst xmlns:a="http://schemas.openxmlformats.org/drawingml/2006/main">
               <a:ext uri="{FF2B5EF4-FFF2-40B4-BE49-F238E27FC236}">
-                <a16:creationId xmlns:a16="http://schemas.microsoft.com/office/drawing/2014/main" id="{C6F2843D-7B77-43E2-A546-02B2C444B367}"/>
+                <a16:creationId xmlns:a16="http://schemas.microsoft.com/office/drawing/2014/main" id="{9AC34A70-62E1-4DE3-A86D-C20C669364CC}"/>
               </a:ext>
             </a:extLst>
           </p:cNvPr>
@@ -5876,7 +5876,7 @@
           <p:cNvPr id="7" name="">
             <a:extLst xmlns:a="http://schemas.openxmlformats.org/drawingml/2006/main">
               <a:ext uri="{FF2B5EF4-FFF2-40B4-BE49-F238E27FC236}">
-                <a16:creationId xmlns:a16="http://schemas.microsoft.com/office/drawing/2014/main" id="{EA936378-49FA-438F-86D7-A0D935738FA1}"/>
+                <a16:creationId xmlns:a16="http://schemas.microsoft.com/office/drawing/2014/main" id="{6A41E4BE-4526-4ED4-8584-497496C0A571}"/>
               </a:ext>
             </a:extLst>
           </p:cNvPr>
@@ -5908,7 +5908,7 @@
           <p:cNvPr id="8" name="">
             <a:extLst xmlns:a="http://schemas.openxmlformats.org/drawingml/2006/main">
               <a:ext uri="{FF2B5EF4-FFF2-40B4-BE49-F238E27FC236}">
-                <a16:creationId xmlns:a16="http://schemas.microsoft.com/office/drawing/2014/main" id="{C55752B3-B456-4A8B-A0A2-7A1A3C8ADC18}"/>
+                <a16:creationId xmlns:a16="http://schemas.microsoft.com/office/drawing/2014/main" id="{F0166D7B-6C24-4920-A70A-278CA9157CBE}"/>
               </a:ext>
             </a:extLst>
           </p:cNvPr>
@@ -5965,7 +5965,7 @@
           <p:cNvPr id="9" name="">
             <a:extLst xmlns:a="http://schemas.openxmlformats.org/drawingml/2006/main">
               <a:ext uri="{FF2B5EF4-FFF2-40B4-BE49-F238E27FC236}">
-                <a16:creationId xmlns:a16="http://schemas.microsoft.com/office/drawing/2014/main" id="{64313830-2197-4688-95D9-3DE24AE5B609}"/>
+                <a16:creationId xmlns:a16="http://schemas.microsoft.com/office/drawing/2014/main" id="{62429C55-5669-43F7-B2F8-B7C72118BE27}"/>
               </a:ext>
             </a:extLst>
           </p:cNvPr>
@@ -6022,7 +6022,7 @@
           <p:cNvPr id="10" name="">
             <a:extLst xmlns:a="http://schemas.openxmlformats.org/drawingml/2006/main">
               <a:ext uri="{FF2B5EF4-FFF2-40B4-BE49-F238E27FC236}">
-                <a16:creationId xmlns:a16="http://schemas.microsoft.com/office/drawing/2014/main" id="{04110F8F-ED0E-4514-867F-EF4BB782B116}"/>
+                <a16:creationId xmlns:a16="http://schemas.microsoft.com/office/drawing/2014/main" id="{264D4DD0-1D8F-4E8C-923D-C63C30545584}"/>
               </a:ext>
             </a:extLst>
           </p:cNvPr>
@@ -6056,7 +6056,7 @@
           <p:cNvPr id="11" name="">
             <a:extLst xmlns:a="http://schemas.openxmlformats.org/drawingml/2006/main">
               <a:ext uri="{FF2B5EF4-FFF2-40B4-BE49-F238E27FC236}">
-                <a16:creationId xmlns:a16="http://schemas.microsoft.com/office/drawing/2014/main" id="{2195FDE4-1D3F-4267-BF81-BA0046D4BD00}"/>
+                <a16:creationId xmlns:a16="http://schemas.microsoft.com/office/drawing/2014/main" id="{A2576727-A133-43C5-86D0-8E6EFD0B13AB}"/>
               </a:ext>
             </a:extLst>
           </p:cNvPr>
@@ -6088,7 +6088,7 @@
           <p:cNvPr id="12" name="">
             <a:extLst xmlns:a="http://schemas.openxmlformats.org/drawingml/2006/main">
               <a:ext uri="{FF2B5EF4-FFF2-40B4-BE49-F238E27FC236}">
-                <a16:creationId xmlns:a16="http://schemas.microsoft.com/office/drawing/2014/main" id="{F24310F0-4B0A-492B-81B2-7B286B81C8D9}"/>
+                <a16:creationId xmlns:a16="http://schemas.microsoft.com/office/drawing/2014/main" id="{0318112D-A9D2-430A-8A26-9A6227EBD032}"/>
               </a:ext>
             </a:extLst>
           </p:cNvPr>
@@ -6145,7 +6145,7 @@
           <p:cNvPr id="13" name="">
             <a:extLst xmlns:a="http://schemas.openxmlformats.org/drawingml/2006/main">
               <a:ext uri="{FF2B5EF4-FFF2-40B4-BE49-F238E27FC236}">
-                <a16:creationId xmlns:a16="http://schemas.microsoft.com/office/drawing/2014/main" id="{E5EC4990-21EE-48B8-BE30-4217F5B578F0}"/>
+                <a16:creationId xmlns:a16="http://schemas.microsoft.com/office/drawing/2014/main" id="{80E4ED33-E97C-4BDD-860C-EA4E3DBB004B}"/>
               </a:ext>
             </a:extLst>
           </p:cNvPr>
@@ -6202,7 +6202,7 @@
           <p:cNvPr id="14" name="">
             <a:extLst xmlns:a="http://schemas.openxmlformats.org/drawingml/2006/main">
               <a:ext uri="{FF2B5EF4-FFF2-40B4-BE49-F238E27FC236}">
-                <a16:creationId xmlns:a16="http://schemas.microsoft.com/office/drawing/2014/main" id="{1A43C50F-65D4-4E28-8008-34ADC378ACAA}"/>
+                <a16:creationId xmlns:a16="http://schemas.microsoft.com/office/drawing/2014/main" id="{E5DCA561-0C0B-468A-A118-FC5B95C507EC}"/>
               </a:ext>
             </a:extLst>
           </p:cNvPr>
@@ -6236,7 +6236,7 @@
           <p:cNvPr id="15" name="">
             <a:extLst xmlns:a="http://schemas.openxmlformats.org/drawingml/2006/main">
               <a:ext uri="{FF2B5EF4-FFF2-40B4-BE49-F238E27FC236}">
-                <a16:creationId xmlns:a16="http://schemas.microsoft.com/office/drawing/2014/main" id="{A9AA074D-ED32-4030-B095-3E329B9129E3}"/>
+                <a16:creationId xmlns:a16="http://schemas.microsoft.com/office/drawing/2014/main" id="{8E0C6A15-886E-4A26-9EB8-24FBD363785F}"/>
               </a:ext>
             </a:extLst>
           </p:cNvPr>
@@ -6268,7 +6268,7 @@
           <p:cNvPr id="16" name="">
             <a:extLst xmlns:a="http://schemas.openxmlformats.org/drawingml/2006/main">
               <a:ext uri="{FF2B5EF4-FFF2-40B4-BE49-F238E27FC236}">
-                <a16:creationId xmlns:a16="http://schemas.microsoft.com/office/drawing/2014/main" id="{01FFB19C-E82E-4F94-ACC6-4556F4690606}"/>
+                <a16:creationId xmlns:a16="http://schemas.microsoft.com/office/drawing/2014/main" id="{B5B46F32-3F3B-4FEC-90FD-A37BCB32655D}"/>
               </a:ext>
             </a:extLst>
           </p:cNvPr>
@@ -6325,7 +6325,7 @@
           <p:cNvPr id="17" name="">
             <a:extLst xmlns:a="http://schemas.openxmlformats.org/drawingml/2006/main">
               <a:ext uri="{FF2B5EF4-FFF2-40B4-BE49-F238E27FC236}">
-                <a16:creationId xmlns:a16="http://schemas.microsoft.com/office/drawing/2014/main" id="{D8910975-9087-4D89-884E-69E1F0B1AB17}"/>
+                <a16:creationId xmlns:a16="http://schemas.microsoft.com/office/drawing/2014/main" id="{BE47EBC2-9F24-4274-9A95-2DDD187A7D13}"/>
               </a:ext>
             </a:extLst>
           </p:cNvPr>
@@ -6382,7 +6382,7 @@
           <p:cNvPr id="18" name="">
             <a:extLst xmlns:a="http://schemas.openxmlformats.org/drawingml/2006/main">
               <a:ext uri="{FF2B5EF4-FFF2-40B4-BE49-F238E27FC236}">
-                <a16:creationId xmlns:a16="http://schemas.microsoft.com/office/drawing/2014/main" id="{B357CE34-4B30-4C6E-B121-E323FFE43D2B}"/>
+                <a16:creationId xmlns:a16="http://schemas.microsoft.com/office/drawing/2014/main" id="{1923D36C-A96F-4681-9EBD-E05B2A096BB9}"/>
               </a:ext>
             </a:extLst>
           </p:cNvPr>
@@ -6416,7 +6416,7 @@
           <p:cNvPr id="19" name="">
             <a:extLst xmlns:a="http://schemas.openxmlformats.org/drawingml/2006/main">
               <a:ext uri="{FF2B5EF4-FFF2-40B4-BE49-F238E27FC236}">
-                <a16:creationId xmlns:a16="http://schemas.microsoft.com/office/drawing/2014/main" id="{9B19F053-1316-48E7-897C-A3179B67C212}"/>
+                <a16:creationId xmlns:a16="http://schemas.microsoft.com/office/drawing/2014/main" id="{81F965C6-5687-417B-B229-26E33A12EC2C}"/>
               </a:ext>
             </a:extLst>
           </p:cNvPr>
@@ -6448,7 +6448,7 @@
           <p:cNvPr id="20" name="">
             <a:extLst xmlns:a="http://schemas.openxmlformats.org/drawingml/2006/main">
               <a:ext uri="{FF2B5EF4-FFF2-40B4-BE49-F238E27FC236}">
-                <a16:creationId xmlns:a16="http://schemas.microsoft.com/office/drawing/2014/main" id="{52A6D659-5877-49DF-976B-3831A3B4476C}"/>
+                <a16:creationId xmlns:a16="http://schemas.microsoft.com/office/drawing/2014/main" id="{C71AFD3A-7C79-489E-8DEC-FDD61964F989}"/>
               </a:ext>
             </a:extLst>
           </p:cNvPr>
@@ -6505,7 +6505,7 @@
           <p:cNvPr id="21" name="">
             <a:extLst xmlns:a="http://schemas.openxmlformats.org/drawingml/2006/main">
               <a:ext uri="{FF2B5EF4-FFF2-40B4-BE49-F238E27FC236}">
-                <a16:creationId xmlns:a16="http://schemas.microsoft.com/office/drawing/2014/main" id="{6C0801E0-7E32-40CA-A709-CF11C49E5F6E}"/>
+                <a16:creationId xmlns:a16="http://schemas.microsoft.com/office/drawing/2014/main" id="{7C99AFC0-19FC-400D-8BCF-B1D39008140D}"/>
               </a:ext>
             </a:extLst>
           </p:cNvPr>
@@ -6562,7 +6562,7 @@
           <p:cNvPr id="22" name="">
             <a:extLst xmlns:a="http://schemas.openxmlformats.org/drawingml/2006/main">
               <a:ext uri="{FF2B5EF4-FFF2-40B4-BE49-F238E27FC236}">
-                <a16:creationId xmlns:a16="http://schemas.microsoft.com/office/drawing/2014/main" id="{9E325324-2E7D-4053-961A-CB45CCE8B355}"/>
+                <a16:creationId xmlns:a16="http://schemas.microsoft.com/office/drawing/2014/main" id="{97ADC9D6-9E47-43B3-806C-2458525AA4C7}"/>
               </a:ext>
             </a:extLst>
           </p:cNvPr>
@@ -6617,7 +6617,7 @@
     </p:spTree>
     <p:extLst>
       <p:ext uri="{BB962C8B-B14F-4D97-AF65-F5344CB8AC3E}">
-        <p14:creationId xmlns:p14="http://schemas.microsoft.com/office/powerpoint/2010/main" val="423504446"/>
+        <p14:creationId xmlns:p14="http://schemas.microsoft.com/office/powerpoint/2010/main" val="1519851902"/>
       </p:ext>
     </p:extLst>
   </p:cSld>
@@ -6818,7 +6818,7 @@
           <p:cNvPr id="16" name="">
             <a:extLst xmlns:a="http://schemas.openxmlformats.org/drawingml/2006/main">
               <a:ext uri="{FF2B5EF4-FFF2-40B4-BE49-F238E27FC236}">
-                <a16:creationId xmlns:a16="http://schemas.microsoft.com/office/drawing/2014/main" id="{12A495F1-A08E-427A-A295-15F44F6EDFC8}"/>
+                <a16:creationId xmlns:a16="http://schemas.microsoft.com/office/drawing/2014/main" id="{A3DD9657-6F92-4308-92B1-E768FCB03925}"/>
               </a:ext>
             </a:extLst>
           </p:cNvPr>
@@ -6850,7 +6850,7 @@
           <p:cNvPr id="2" name="">
             <a:extLst xmlns:a="http://schemas.openxmlformats.org/drawingml/2006/main">
               <a:ext uri="{FF2B5EF4-FFF2-40B4-BE49-F238E27FC236}">
-                <a16:creationId xmlns:a16="http://schemas.microsoft.com/office/drawing/2014/main" id="{2846804A-CE12-4E53-9C29-CE7B1982A374}"/>
+                <a16:creationId xmlns:a16="http://schemas.microsoft.com/office/drawing/2014/main" id="{86297D15-D15D-44E0-A10B-9B4845717390}"/>
               </a:ext>
             </a:extLst>
           </p:cNvPr>
@@ -6907,7 +6907,7 @@
           <p:cNvPr id="3" name="">
             <a:extLst xmlns:a="http://schemas.openxmlformats.org/drawingml/2006/main">
               <a:ext uri="{FF2B5EF4-FFF2-40B4-BE49-F238E27FC236}">
-                <a16:creationId xmlns:a16="http://schemas.microsoft.com/office/drawing/2014/main" id="{D5B9A44B-F4A9-4FC6-AF69-49FFC371BE60}"/>
+                <a16:creationId xmlns:a16="http://schemas.microsoft.com/office/drawing/2014/main" id="{BDB64C8A-BC63-4697-9559-3C6FEF2B6BA6}"/>
               </a:ext>
             </a:extLst>
           </p:cNvPr>
@@ -6939,7 +6939,7 @@
           <p:cNvPr id="4" name="">
             <a:extLst xmlns:a="http://schemas.openxmlformats.org/drawingml/2006/main">
               <a:ext uri="{FF2B5EF4-FFF2-40B4-BE49-F238E27FC236}">
-                <a16:creationId xmlns:a16="http://schemas.microsoft.com/office/drawing/2014/main" id="{9646427E-36BD-4B78-9E19-F3D3A714DE4B}"/>
+                <a16:creationId xmlns:a16="http://schemas.microsoft.com/office/drawing/2014/main" id="{57141EA6-C5FB-4B78-837E-DF66C6F194B8}"/>
               </a:ext>
             </a:extLst>
           </p:cNvPr>
@@ -6996,7 +6996,7 @@
           <p:cNvPr id="5" name="">
             <a:extLst xmlns:a="http://schemas.openxmlformats.org/drawingml/2006/main">
               <a:ext uri="{FF2B5EF4-FFF2-40B4-BE49-F238E27FC236}">
-                <a16:creationId xmlns:a16="http://schemas.microsoft.com/office/drawing/2014/main" id="{91857E03-BFD8-4D5D-A8AF-1E5C1EC27FB3}"/>
+                <a16:creationId xmlns:a16="http://schemas.microsoft.com/office/drawing/2014/main" id="{B61F8613-4BF5-49F7-8E56-1C4CF3147C81}"/>
               </a:ext>
             </a:extLst>
           </p:cNvPr>
@@ -7053,7 +7053,7 @@
           <p:cNvPr id="6" name="">
             <a:extLst xmlns:a="http://schemas.openxmlformats.org/drawingml/2006/main">
               <a:ext uri="{FF2B5EF4-FFF2-40B4-BE49-F238E27FC236}">
-                <a16:creationId xmlns:a16="http://schemas.microsoft.com/office/drawing/2014/main" id="{4A81439A-D49F-45B7-A7BF-61C41EEB3165}"/>
+                <a16:creationId xmlns:a16="http://schemas.microsoft.com/office/drawing/2014/main" id="{0B1FD7DA-6035-4128-A8CA-4A37A7ACF469}"/>
               </a:ext>
             </a:extLst>
           </p:cNvPr>
@@ -7110,7 +7110,7 @@
           <p:cNvPr id="7" name="">
             <a:extLst xmlns:a="http://schemas.openxmlformats.org/drawingml/2006/main">
               <a:ext uri="{FF2B5EF4-FFF2-40B4-BE49-F238E27FC236}">
-                <a16:creationId xmlns:a16="http://schemas.microsoft.com/office/drawing/2014/main" id="{A3FA14F8-F1F1-46B2-8B88-01B46B2C45AC}"/>
+                <a16:creationId xmlns:a16="http://schemas.microsoft.com/office/drawing/2014/main" id="{5E6197A7-C7D6-4286-904E-13430C0E0DFC}"/>
               </a:ext>
             </a:extLst>
           </p:cNvPr>
@@ -7142,7 +7142,7 @@
           <p:cNvPr id="8" name="">
             <a:extLst xmlns:a="http://schemas.openxmlformats.org/drawingml/2006/main">
               <a:ext uri="{FF2B5EF4-FFF2-40B4-BE49-F238E27FC236}">
-                <a16:creationId xmlns:a16="http://schemas.microsoft.com/office/drawing/2014/main" id="{FCDA7289-061A-499C-8B31-BC72F465E95B}"/>
+                <a16:creationId xmlns:a16="http://schemas.microsoft.com/office/drawing/2014/main" id="{ED34DE35-4BBC-4F54-9CAB-86100CBA8F5F}"/>
               </a:ext>
             </a:extLst>
           </p:cNvPr>
@@ -7199,7 +7199,7 @@
           <p:cNvPr id="9" name="">
             <a:extLst xmlns:a="http://schemas.openxmlformats.org/drawingml/2006/main">
               <a:ext uri="{FF2B5EF4-FFF2-40B4-BE49-F238E27FC236}">
-                <a16:creationId xmlns:a16="http://schemas.microsoft.com/office/drawing/2014/main" id="{F0E4AD50-E98F-4CA4-A61F-8B05B9B92AC7}"/>
+                <a16:creationId xmlns:a16="http://schemas.microsoft.com/office/drawing/2014/main" id="{850FE633-50F8-4893-826C-0F6A99755E5D}"/>
               </a:ext>
             </a:extLst>
           </p:cNvPr>
@@ -7256,7 +7256,7 @@
           <p:cNvPr id="10" name="">
             <a:extLst xmlns:a="http://schemas.openxmlformats.org/drawingml/2006/main">
               <a:ext uri="{FF2B5EF4-FFF2-40B4-BE49-F238E27FC236}">
-                <a16:creationId xmlns:a16="http://schemas.microsoft.com/office/drawing/2014/main" id="{DFA1B9FC-0ACA-4F36-90F6-6EE75105B774}"/>
+                <a16:creationId xmlns:a16="http://schemas.microsoft.com/office/drawing/2014/main" id="{194BD0C0-AB87-48CE-932F-105256B3721B}"/>
               </a:ext>
             </a:extLst>
           </p:cNvPr>
@@ -7313,7 +7313,7 @@
           <p:cNvPr id="11" name="">
             <a:extLst xmlns:a="http://schemas.openxmlformats.org/drawingml/2006/main">
               <a:ext uri="{FF2B5EF4-FFF2-40B4-BE49-F238E27FC236}">
-                <a16:creationId xmlns:a16="http://schemas.microsoft.com/office/drawing/2014/main" id="{F481BD23-E5D0-456F-94F7-75CC76E79B2F}"/>
+                <a16:creationId xmlns:a16="http://schemas.microsoft.com/office/drawing/2014/main" id="{423A90BE-699A-46E2-B5BC-E15AA7FB58D7}"/>
               </a:ext>
             </a:extLst>
           </p:cNvPr>
@@ -7345,7 +7345,7 @@
           <p:cNvPr id="12" name="">
             <a:extLst xmlns:a="http://schemas.openxmlformats.org/drawingml/2006/main">
               <a:ext uri="{FF2B5EF4-FFF2-40B4-BE49-F238E27FC236}">
-                <a16:creationId xmlns:a16="http://schemas.microsoft.com/office/drawing/2014/main" id="{DC5D7B76-4283-4717-93D1-7117E7C9E2FE}"/>
+                <a16:creationId xmlns:a16="http://schemas.microsoft.com/office/drawing/2014/main" id="{33B5E76F-3FD9-4240-8321-1914B1C27EAB}"/>
               </a:ext>
             </a:extLst>
           </p:cNvPr>
@@ -7402,7 +7402,7 @@
           <p:cNvPr id="13" name="">
             <a:extLst xmlns:a="http://schemas.openxmlformats.org/drawingml/2006/main">
               <a:ext uri="{FF2B5EF4-FFF2-40B4-BE49-F238E27FC236}">
-                <a16:creationId xmlns:a16="http://schemas.microsoft.com/office/drawing/2014/main" id="{C9AAA31D-0B06-43B8-82C1-A4288B7030D0}"/>
+                <a16:creationId xmlns:a16="http://schemas.microsoft.com/office/drawing/2014/main" id="{A11AC2DC-41E2-4245-8E2B-F334F9770072}"/>
               </a:ext>
             </a:extLst>
           </p:cNvPr>
@@ -7459,7 +7459,7 @@
           <p:cNvPr id="14" name="">
             <a:extLst xmlns:a="http://schemas.openxmlformats.org/drawingml/2006/main">
               <a:ext uri="{FF2B5EF4-FFF2-40B4-BE49-F238E27FC236}">
-                <a16:creationId xmlns:a16="http://schemas.microsoft.com/office/drawing/2014/main" id="{4E9040D5-70BE-4BB0-AACE-EF9E3542ACC9}"/>
+                <a16:creationId xmlns:a16="http://schemas.microsoft.com/office/drawing/2014/main" id="{76761EAF-9128-4552-B886-0EF1BAC400FE}"/>
               </a:ext>
             </a:extLst>
           </p:cNvPr>
@@ -7516,7 +7516,7 @@
           <p:cNvPr id="15" name="">
             <a:extLst xmlns:a="http://schemas.openxmlformats.org/drawingml/2006/main">
               <a:ext uri="{FF2B5EF4-FFF2-40B4-BE49-F238E27FC236}">
-                <a16:creationId xmlns:a16="http://schemas.microsoft.com/office/drawing/2014/main" id="{47E205F8-16BF-4002-B85B-5BA53C6B9C03}"/>
+                <a16:creationId xmlns:a16="http://schemas.microsoft.com/office/drawing/2014/main" id="{26FA81E4-3311-4A08-87B6-20890B3C78F7}"/>
               </a:ext>
             </a:extLst>
           </p:cNvPr>
@@ -7571,7 +7571,7 @@
     </p:spTree>
     <p:extLst>
       <p:ext uri="{BB962C8B-B14F-4D97-AF65-F5344CB8AC3E}">
-        <p14:creationId xmlns:p14="http://schemas.microsoft.com/office/powerpoint/2010/main" val="2041525798"/>
+        <p14:creationId xmlns:p14="http://schemas.microsoft.com/office/powerpoint/2010/main" val="555440488"/>
       </p:ext>
     </p:extLst>
   </p:cSld>
@@ -7769,10 +7769,10 @@
       </p:grpSpPr>
       <p:sp>
         <p:nvSpPr>
-          <p:cNvPr id="23" name="">
-            <a:extLst xmlns:a="http://schemas.openxmlformats.org/drawingml/2006/main">
-              <a:ext uri="{FF2B5EF4-FFF2-40B4-BE49-F238E27FC236}">
-                <a16:creationId xmlns:a16="http://schemas.microsoft.com/office/drawing/2014/main" id="{1E7496CE-783A-4A37-8937-2A062D7E8C99}"/>
+          <p:cNvPr id="26" name="">
+            <a:extLst xmlns:a="http://schemas.openxmlformats.org/drawingml/2006/main">
+              <a:ext uri="{FF2B5EF4-FFF2-40B4-BE49-F238E27FC236}">
+                <a16:creationId xmlns:a16="http://schemas.microsoft.com/office/drawing/2014/main" id="{86457DE6-2A24-4907-84FF-F3BEA9FDCBB2}"/>
               </a:ext>
             </a:extLst>
           </p:cNvPr>
@@ -7804,7 +7804,7 @@
           <p:cNvPr id="2" name="">
             <a:extLst xmlns:a="http://schemas.openxmlformats.org/drawingml/2006/main">
               <a:ext uri="{FF2B5EF4-FFF2-40B4-BE49-F238E27FC236}">
-                <a16:creationId xmlns:a16="http://schemas.microsoft.com/office/drawing/2014/main" id="{42F528AA-B718-4FF8-8524-DC97D8D4B5CF}"/>
+                <a16:creationId xmlns:a16="http://schemas.microsoft.com/office/drawing/2014/main" id="{FD32D8FE-EF39-4BBA-9CE1-46D9433F0186}"/>
               </a:ext>
             </a:extLst>
           </p:cNvPr>
@@ -7861,7 +7861,7 @@
           <p:cNvPr id="3" name="">
             <a:extLst xmlns:a="http://schemas.openxmlformats.org/drawingml/2006/main">
               <a:ext uri="{FF2B5EF4-FFF2-40B4-BE49-F238E27FC236}">
-                <a16:creationId xmlns:a16="http://schemas.microsoft.com/office/drawing/2014/main" id="{01D493A3-F112-48DF-80B2-0C4024A9D216}"/>
+                <a16:creationId xmlns:a16="http://schemas.microsoft.com/office/drawing/2014/main" id="{DDB889D8-B254-45B9-A7CB-89F159B43C72}"/>
               </a:ext>
             </a:extLst>
           </p:cNvPr>
@@ -7893,7 +7893,7 @@
           <p:cNvPr id="4" name="">
             <a:extLst xmlns:a="http://schemas.openxmlformats.org/drawingml/2006/main">
               <a:ext uri="{FF2B5EF4-FFF2-40B4-BE49-F238E27FC236}">
-                <a16:creationId xmlns:a16="http://schemas.microsoft.com/office/drawing/2014/main" id="{3ACC1870-511C-4BF2-9742-543CEED855FA}"/>
+                <a16:creationId xmlns:a16="http://schemas.microsoft.com/office/drawing/2014/main" id="{05E32A93-999A-4912-A5F4-3871602777B5}"/>
               </a:ext>
             </a:extLst>
           </p:cNvPr>
@@ -7950,7 +7950,7 @@
           <p:cNvPr id="5" name="">
             <a:extLst xmlns:a="http://schemas.openxmlformats.org/drawingml/2006/main">
               <a:ext uri="{FF2B5EF4-FFF2-40B4-BE49-F238E27FC236}">
-                <a16:creationId xmlns:a16="http://schemas.microsoft.com/office/drawing/2014/main" id="{C30E49F8-4266-4391-9EEA-89687DEEE0C4}"/>
+                <a16:creationId xmlns:a16="http://schemas.microsoft.com/office/drawing/2014/main" id="{A52D1EAB-F9E9-4DDA-9DEA-7B4288F638DB}"/>
               </a:ext>
             </a:extLst>
           </p:cNvPr>
@@ -8007,7 +8007,7 @@
           <p:cNvPr id="6" name="">
             <a:extLst xmlns:a="http://schemas.openxmlformats.org/drawingml/2006/main">
               <a:ext uri="{FF2B5EF4-FFF2-40B4-BE49-F238E27FC236}">
-                <a16:creationId xmlns:a16="http://schemas.microsoft.com/office/drawing/2014/main" id="{D77DC42A-8E8B-4CEF-8EEB-16E25ED05B57}"/>
+                <a16:creationId xmlns:a16="http://schemas.microsoft.com/office/drawing/2014/main" id="{4D8707D8-A250-4EF8-938D-6103E3E907E4}"/>
               </a:ext>
             </a:extLst>
           </p:cNvPr>
@@ -8064,7 +8064,7 @@
           <p:cNvPr id="7" name="">
             <a:extLst xmlns:a="http://schemas.openxmlformats.org/drawingml/2006/main">
               <a:ext uri="{FF2B5EF4-FFF2-40B4-BE49-F238E27FC236}">
-                <a16:creationId xmlns:a16="http://schemas.microsoft.com/office/drawing/2014/main" id="{7C9D19E7-994B-4461-A859-74DECC0D1E25}"/>
+                <a16:creationId xmlns:a16="http://schemas.microsoft.com/office/drawing/2014/main" id="{9374712A-D5A1-4F0E-8258-22AE9741A313}"/>
               </a:ext>
             </a:extLst>
           </p:cNvPr>
@@ -8096,7 +8096,7 @@
           <p:cNvPr id="8" name="">
             <a:extLst xmlns:a="http://schemas.openxmlformats.org/drawingml/2006/main">
               <a:ext uri="{FF2B5EF4-FFF2-40B4-BE49-F238E27FC236}">
-                <a16:creationId xmlns:a16="http://schemas.microsoft.com/office/drawing/2014/main" id="{3D82A5C4-19F6-488E-9C65-06BFC28C3049}"/>
+                <a16:creationId xmlns:a16="http://schemas.microsoft.com/office/drawing/2014/main" id="{509872BF-9FA7-4F74-8B06-168873BD226A}"/>
               </a:ext>
             </a:extLst>
           </p:cNvPr>
@@ -8153,7 +8153,7 @@
           <p:cNvPr id="9" name="">
             <a:extLst xmlns:a="http://schemas.openxmlformats.org/drawingml/2006/main">
               <a:ext uri="{FF2B5EF4-FFF2-40B4-BE49-F238E27FC236}">
-                <a16:creationId xmlns:a16="http://schemas.microsoft.com/office/drawing/2014/main" id="{D8D2CDCC-DB3A-4CBC-A06F-70A9EFDAC040}"/>
+                <a16:creationId xmlns:a16="http://schemas.microsoft.com/office/drawing/2014/main" id="{C1CD9C33-DB5E-479E-94FE-44F2696E19C5}"/>
               </a:ext>
             </a:extLst>
           </p:cNvPr>
@@ -8210,19 +8210,19 @@
           <p:cNvPr id="10" name="">
             <a:extLst xmlns:a="http://schemas.openxmlformats.org/drawingml/2006/main">
               <a:ext uri="{FF2B5EF4-FFF2-40B4-BE49-F238E27FC236}">
-                <a16:creationId xmlns:a16="http://schemas.microsoft.com/office/drawing/2014/main" id="{E95850B7-E51E-47A4-B7C6-86ED0987EF94}"/>
-              </a:ext>
-            </a:extLst>
-          </p:cNvPr>
-          <p:cNvSpPr>
-            <a:spLocks xmlns:a="http://schemas.openxmlformats.org/drawingml/2006/main" noGrp="1"/>
-          </p:cNvSpPr>
-          <p:nvPr/>
-        </p:nvSpPr>
-        <p:spPr>
-          <a:xfrm xmlns:a="http://schemas.openxmlformats.org/drawingml/2006/main">
-            <a:off x="914400" y="1257300"/>
-            <a:ext cx="10363200" cy="781050"/>
+                <a16:creationId xmlns:a16="http://schemas.microsoft.com/office/drawing/2014/main" id="{50A6B890-BE63-4561-914D-3F1B48BFB2DE}"/>
+              </a:ext>
+            </a:extLst>
+          </p:cNvPr>
+          <p:cNvSpPr>
+            <a:spLocks xmlns:a="http://schemas.openxmlformats.org/drawingml/2006/main" noGrp="1"/>
+          </p:cNvSpPr>
+          <p:nvPr/>
+        </p:nvSpPr>
+        <p:spPr>
+          <a:xfrm xmlns:a="http://schemas.openxmlformats.org/drawingml/2006/main">
+            <a:off x="857250" y="1219200"/>
+            <a:ext cx="10477500" cy="742950"/>
           </a:xfrm>
           <a:prstGeom xmlns:a="http://schemas.openxmlformats.org/drawingml/2006/main" prst="rect">
             <a:avLst/>
@@ -8239,7 +8239,7 @@
           <a:lstStyle xmlns:a="http://schemas.openxmlformats.org/drawingml/2006/main"/>
           <a:p xmlns:a="http://schemas.openxmlformats.org/drawingml/2006/main">
             <a:pPr algn="ctr">
-              <a:defRPr sz="2175" b="1">
+              <a:defRPr sz="2100" b="1">
                 <a:solidFill>
                   <a:srgbClr val="17253A"/>
                 </a:solidFill>
@@ -8249,7 +8249,7 @@
               </a:defRPr>
             </a:pPr>
             <a:r>
-              <a:rPr sz="2175" b="1">
+              <a:rPr sz="2100" b="1">
                 <a:solidFill>
                   <a:srgbClr val="17253A"/>
                 </a:solidFill>
@@ -8267,28 +8267,30 @@
           <p:cNvPr id="11" name="">
             <a:extLst xmlns:a="http://schemas.openxmlformats.org/drawingml/2006/main">
               <a:ext uri="{FF2B5EF4-FFF2-40B4-BE49-F238E27FC236}">
-                <a16:creationId xmlns:a16="http://schemas.microsoft.com/office/drawing/2014/main" id="{95928A7F-0067-4928-B624-76B6E600BD08}"/>
-              </a:ext>
-            </a:extLst>
-          </p:cNvPr>
-          <p:cNvSpPr>
-            <a:spLocks xmlns:a="http://schemas.openxmlformats.org/drawingml/2006/main" noGrp="1"/>
-          </p:cNvSpPr>
-          <p:nvPr/>
-        </p:nvSpPr>
-        <p:spPr>
-          <a:xfrm xmlns:a="http://schemas.openxmlformats.org/drawingml/2006/main">
-            <a:off x="1000125" y="2247900"/>
-            <a:ext cx="476250" cy="476250"/>
-          </a:xfrm>
-          <a:prstGeom xmlns:a="http://schemas.openxmlformats.org/drawingml/2006/main" prst="ellipse">
+                <a16:creationId xmlns:a16="http://schemas.microsoft.com/office/drawing/2014/main" id="{33F844E0-3F76-4162-8E57-6A46F58C9A4B}"/>
+              </a:ext>
+            </a:extLst>
+          </p:cNvPr>
+          <p:cNvSpPr>
+            <a:spLocks xmlns:a="http://schemas.openxmlformats.org/drawingml/2006/main" noGrp="1"/>
+          </p:cNvSpPr>
+          <p:nvPr/>
+        </p:nvSpPr>
+        <p:spPr>
+          <a:xfrm xmlns:a="http://schemas.openxmlformats.org/drawingml/2006/main">
+            <a:off x="971550" y="2124075"/>
+            <a:ext cx="38100" cy="3524250"/>
+          </a:xfrm>
+          <a:prstGeom xmlns:a="http://schemas.openxmlformats.org/drawingml/2006/main" prst="rect">
             <a:avLst/>
           </a:prstGeom>
           <a:solidFill xmlns:a="http://schemas.openxmlformats.org/drawingml/2006/main">
-            <a:srgbClr val="18324A"/>
+            <a:srgbClr val="2C6E73"/>
           </a:solidFill>
           <a:ln xmlns:a="http://schemas.openxmlformats.org/drawingml/2006/main" w="0">
-            <a:noFill/>
+            <a:solidFill>
+              <a:srgbClr val="2C6E73"/>
+            </a:solidFill>
           </a:ln>
         </p:spPr>
       </p:sp>
@@ -8297,19 +8299,19 @@
           <p:cNvPr id="12" name="">
             <a:extLst xmlns:a="http://schemas.openxmlformats.org/drawingml/2006/main">
               <a:ext uri="{FF2B5EF4-FFF2-40B4-BE49-F238E27FC236}">
-                <a16:creationId xmlns:a16="http://schemas.microsoft.com/office/drawing/2014/main" id="{B4A09859-4A0F-43C2-B86F-241C200C8C6C}"/>
-              </a:ext>
-            </a:extLst>
-          </p:cNvPr>
-          <p:cNvSpPr>
-            <a:spLocks xmlns:a="http://schemas.openxmlformats.org/drawingml/2006/main" noGrp="1"/>
-          </p:cNvSpPr>
-          <p:nvPr/>
-        </p:nvSpPr>
-        <p:spPr>
-          <a:xfrm xmlns:a="http://schemas.openxmlformats.org/drawingml/2006/main">
-            <a:off x="1000125" y="2276475"/>
-            <a:ext cx="476250" cy="419100"/>
+                <a16:creationId xmlns:a16="http://schemas.microsoft.com/office/drawing/2014/main" id="{1DF2C774-3B81-4093-9581-BAD5306A6411}"/>
+              </a:ext>
+            </a:extLst>
+          </p:cNvPr>
+          <p:cNvSpPr>
+            <a:spLocks xmlns:a="http://schemas.openxmlformats.org/drawingml/2006/main" noGrp="1"/>
+          </p:cNvSpPr>
+          <p:nvPr/>
+        </p:nvSpPr>
+        <p:spPr>
+          <a:xfrm xmlns:a="http://schemas.openxmlformats.org/drawingml/2006/main">
+            <a:off x="1162050" y="2200275"/>
+            <a:ext cx="400050" cy="400050"/>
           </a:xfrm>
           <a:prstGeom xmlns:a="http://schemas.openxmlformats.org/drawingml/2006/main" prst="rect">
             <a:avLst/>
@@ -8326,9 +8328,9 @@
           <a:lstStyle xmlns:a="http://schemas.openxmlformats.org/drawingml/2006/main"/>
           <a:p xmlns:a="http://schemas.openxmlformats.org/drawingml/2006/main">
             <a:pPr algn="ctr">
-              <a:defRPr sz="1350" b="1">
-                <a:solidFill>
-                  <a:srgbClr val="FFFFFF"/>
+              <a:defRPr sz="1125" b="1">
+                <a:solidFill>
+                  <a:srgbClr val="2C6E73"/>
                 </a:solidFill>
                 <a:latin typeface="Arial"/>
                 <a:ea typeface="Arial"/>
@@ -8336,9 +8338,9 @@
               </a:defRPr>
             </a:pPr>
             <a:r>
-              <a:rPr sz="1350" b="1">
-                <a:solidFill>
-                  <a:srgbClr val="FFFFFF"/>
+              <a:rPr sz="1125" b="1">
+                <a:solidFill>
+                  <a:srgbClr val="2C6E73"/>
                 </a:solidFill>
                 <a:latin typeface="Arial"/>
                 <a:ea typeface="Arial"/>
@@ -8354,19 +8356,19 @@
           <p:cNvPr id="13" name="">
             <a:extLst xmlns:a="http://schemas.openxmlformats.org/drawingml/2006/main">
               <a:ext uri="{FF2B5EF4-FFF2-40B4-BE49-F238E27FC236}">
-                <a16:creationId xmlns:a16="http://schemas.microsoft.com/office/drawing/2014/main" id="{9F5B5F69-5C66-4FB8-8FFC-EC48E51AEB25}"/>
-              </a:ext>
-            </a:extLst>
-          </p:cNvPr>
-          <p:cNvSpPr>
-            <a:spLocks xmlns:a="http://schemas.openxmlformats.org/drawingml/2006/main" noGrp="1"/>
-          </p:cNvSpPr>
-          <p:nvPr/>
-        </p:nvSpPr>
-        <p:spPr>
-          <a:xfrm xmlns:a="http://schemas.openxmlformats.org/drawingml/2006/main">
-            <a:off x="1714500" y="2181225"/>
-            <a:ext cx="9429750" cy="609600"/>
+                <a16:creationId xmlns:a16="http://schemas.microsoft.com/office/drawing/2014/main" id="{FA7B6BAE-52A6-4C24-94F2-BEF03D537779}"/>
+              </a:ext>
+            </a:extLst>
+          </p:cNvPr>
+          <p:cNvSpPr>
+            <a:spLocks xmlns:a="http://schemas.openxmlformats.org/drawingml/2006/main" noGrp="1"/>
+          </p:cNvSpPr>
+          <p:nvPr/>
+        </p:nvSpPr>
+        <p:spPr>
+          <a:xfrm xmlns:a="http://schemas.openxmlformats.org/drawingml/2006/main">
+            <a:off x="1714500" y="2114550"/>
+            <a:ext cx="9525000" cy="638175"/>
           </a:xfrm>
           <a:prstGeom xmlns:a="http://schemas.openxmlformats.org/drawingml/2006/main" prst="rect">
             <a:avLst/>
@@ -8383,7 +8385,7 @@
           <a:lstStyle xmlns:a="http://schemas.openxmlformats.org/drawingml/2006/main"/>
           <a:p xmlns:a="http://schemas.openxmlformats.org/drawingml/2006/main">
             <a:pPr algn="l">
-              <a:defRPr sz="1500" b="0">
+              <a:defRPr sz="1575" b="0">
                 <a:solidFill>
                   <a:srgbClr val="17253A"/>
                 </a:solidFill>
@@ -8393,7 +8395,7 @@
               </a:defRPr>
             </a:pPr>
             <a:r>
-              <a:rPr sz="1500" b="0">
+              <a:rPr sz="1575" b="0">
                 <a:solidFill>
                   <a:srgbClr val="17253A"/>
                 </a:solidFill>
@@ -8401,7 +8403,7 @@
                 <a:ea typeface="Arial"/>
                 <a:cs typeface="Arial"/>
               </a:rPr>
-              <a:t>Identify the structure: Find a common denominator before combining fractions.</a:t>
+              <a:t>3/4 + 5/6</a:t>
             </a:r>
           </a:p>
         </p:txBody>
@@ -8411,28 +8413,30 @@
           <p:cNvPr id="14" name="">
             <a:extLst xmlns:a="http://schemas.openxmlformats.org/drawingml/2006/main">
               <a:ext uri="{FF2B5EF4-FFF2-40B4-BE49-F238E27FC236}">
-                <a16:creationId xmlns:a16="http://schemas.microsoft.com/office/drawing/2014/main" id="{E605B3CC-A83B-45E6-8759-1476EFA5F0D3}"/>
-              </a:ext>
-            </a:extLst>
-          </p:cNvPr>
-          <p:cNvSpPr>
-            <a:spLocks xmlns:a="http://schemas.openxmlformats.org/drawingml/2006/main" noGrp="1"/>
-          </p:cNvSpPr>
-          <p:nvPr/>
-        </p:nvSpPr>
-        <p:spPr>
-          <a:xfrm xmlns:a="http://schemas.openxmlformats.org/drawingml/2006/main">
-            <a:off x="1000125" y="2990850"/>
-            <a:ext cx="476250" cy="476250"/>
-          </a:xfrm>
-          <a:prstGeom xmlns:a="http://schemas.openxmlformats.org/drawingml/2006/main" prst="ellipse">
+                <a16:creationId xmlns:a16="http://schemas.microsoft.com/office/drawing/2014/main" id="{8EBF02E7-C68E-4434-97D0-D577EC83CC38}"/>
+              </a:ext>
+            </a:extLst>
+          </p:cNvPr>
+          <p:cNvSpPr>
+            <a:spLocks xmlns:a="http://schemas.openxmlformats.org/drawingml/2006/main" noGrp="1"/>
+          </p:cNvSpPr>
+          <p:nvPr/>
+        </p:nvSpPr>
+        <p:spPr>
+          <a:xfrm xmlns:a="http://schemas.openxmlformats.org/drawingml/2006/main">
+            <a:off x="1714500" y="2771775"/>
+            <a:ext cx="9334500" cy="9525"/>
+          </a:xfrm>
+          <a:prstGeom xmlns:a="http://schemas.openxmlformats.org/drawingml/2006/main" prst="rect">
             <a:avLst/>
           </a:prstGeom>
           <a:solidFill xmlns:a="http://schemas.openxmlformats.org/drawingml/2006/main">
-            <a:srgbClr val="2C6E73"/>
+            <a:srgbClr val="D9E0E6"/>
           </a:solidFill>
           <a:ln xmlns:a="http://schemas.openxmlformats.org/drawingml/2006/main" w="0">
-            <a:noFill/>
+            <a:solidFill>
+              <a:srgbClr val="D9E0E6"/>
+            </a:solidFill>
           </a:ln>
         </p:spPr>
       </p:sp>
@@ -8441,19 +8445,19 @@
           <p:cNvPr id="15" name="">
             <a:extLst xmlns:a="http://schemas.openxmlformats.org/drawingml/2006/main">
               <a:ext uri="{FF2B5EF4-FFF2-40B4-BE49-F238E27FC236}">
-                <a16:creationId xmlns:a16="http://schemas.microsoft.com/office/drawing/2014/main" id="{B601DDB8-6BA0-483A-8E7B-E04E226F3FD0}"/>
-              </a:ext>
-            </a:extLst>
-          </p:cNvPr>
-          <p:cNvSpPr>
-            <a:spLocks xmlns:a="http://schemas.openxmlformats.org/drawingml/2006/main" noGrp="1"/>
-          </p:cNvSpPr>
-          <p:nvPr/>
-        </p:nvSpPr>
-        <p:spPr>
-          <a:xfrm xmlns:a="http://schemas.openxmlformats.org/drawingml/2006/main">
-            <a:off x="1000125" y="3019425"/>
-            <a:ext cx="476250" cy="419100"/>
+                <a16:creationId xmlns:a16="http://schemas.microsoft.com/office/drawing/2014/main" id="{F9953470-FDE3-4B1F-B9EA-3E0BE00FA4D5}"/>
+              </a:ext>
+            </a:extLst>
+          </p:cNvPr>
+          <p:cNvSpPr>
+            <a:spLocks xmlns:a="http://schemas.openxmlformats.org/drawingml/2006/main" noGrp="1"/>
+          </p:cNvSpPr>
+          <p:nvPr/>
+        </p:nvSpPr>
+        <p:spPr>
+          <a:xfrm xmlns:a="http://schemas.openxmlformats.org/drawingml/2006/main">
+            <a:off x="1162050" y="2905125"/>
+            <a:ext cx="400050" cy="400050"/>
           </a:xfrm>
           <a:prstGeom xmlns:a="http://schemas.openxmlformats.org/drawingml/2006/main" prst="rect">
             <a:avLst/>
@@ -8470,9 +8474,9 @@
           <a:lstStyle xmlns:a="http://schemas.openxmlformats.org/drawingml/2006/main"/>
           <a:p xmlns:a="http://schemas.openxmlformats.org/drawingml/2006/main">
             <a:pPr algn="ctr">
-              <a:defRPr sz="1350" b="1">
-                <a:solidFill>
-                  <a:srgbClr val="FFFFFF"/>
+              <a:defRPr sz="1125" b="1">
+                <a:solidFill>
+                  <a:srgbClr val="2C6E73"/>
                 </a:solidFill>
                 <a:latin typeface="Arial"/>
                 <a:ea typeface="Arial"/>
@@ -8480,9 +8484,9 @@
               </a:defRPr>
             </a:pPr>
             <a:r>
-              <a:rPr sz="1350" b="1">
-                <a:solidFill>
-                  <a:srgbClr val="FFFFFF"/>
+              <a:rPr sz="1125" b="1">
+                <a:solidFill>
+                  <a:srgbClr val="2C6E73"/>
                 </a:solidFill>
                 <a:latin typeface="Arial"/>
                 <a:ea typeface="Arial"/>
@@ -8498,19 +8502,19 @@
           <p:cNvPr id="16" name="">
             <a:extLst xmlns:a="http://schemas.openxmlformats.org/drawingml/2006/main">
               <a:ext uri="{FF2B5EF4-FFF2-40B4-BE49-F238E27FC236}">
-                <a16:creationId xmlns:a16="http://schemas.microsoft.com/office/drawing/2014/main" id="{98D94F2B-C120-412F-82CF-FE04FD28CD66}"/>
-              </a:ext>
-            </a:extLst>
-          </p:cNvPr>
-          <p:cNvSpPr>
-            <a:spLocks xmlns:a="http://schemas.openxmlformats.org/drawingml/2006/main" noGrp="1"/>
-          </p:cNvSpPr>
-          <p:nvPr/>
-        </p:nvSpPr>
-        <p:spPr>
-          <a:xfrm xmlns:a="http://schemas.openxmlformats.org/drawingml/2006/main">
-            <a:off x="1714500" y="2924175"/>
-            <a:ext cx="9429750" cy="609600"/>
+                <a16:creationId xmlns:a16="http://schemas.microsoft.com/office/drawing/2014/main" id="{8A988548-EFD3-4612-B27A-BFF8A1ECEBEC}"/>
+              </a:ext>
+            </a:extLst>
+          </p:cNvPr>
+          <p:cNvSpPr>
+            <a:spLocks xmlns:a="http://schemas.openxmlformats.org/drawingml/2006/main" noGrp="1"/>
+          </p:cNvSpPr>
+          <p:nvPr/>
+        </p:nvSpPr>
+        <p:spPr>
+          <a:xfrm xmlns:a="http://schemas.openxmlformats.org/drawingml/2006/main">
+            <a:off x="1714500" y="2819400"/>
+            <a:ext cx="9525000" cy="638175"/>
           </a:xfrm>
           <a:prstGeom xmlns:a="http://schemas.openxmlformats.org/drawingml/2006/main" prst="rect">
             <a:avLst/>
@@ -8527,7 +8531,7 @@
           <a:lstStyle xmlns:a="http://schemas.openxmlformats.org/drawingml/2006/main"/>
           <a:p xmlns:a="http://schemas.openxmlformats.org/drawingml/2006/main">
             <a:pPr algn="l">
-              <a:defRPr sz="1500" b="0">
+              <a:defRPr sz="1575" b="0">
                 <a:solidFill>
                   <a:srgbClr val="17253A"/>
                 </a:solidFill>
@@ -8537,7 +8541,7 @@
               </a:defRPr>
             </a:pPr>
             <a:r>
-              <a:rPr sz="1500" b="0">
+              <a:rPr sz="1575" b="0">
                 <a:solidFill>
                   <a:srgbClr val="17253A"/>
                 </a:solidFill>
@@ -8545,7 +8549,7 @@
                 <a:ea typeface="Arial"/>
                 <a:cs typeface="Arial"/>
               </a:rPr>
-              <a:t>Set up the method: Add or subtract the numerators while keeping the denominator.</a:t>
+              <a:t>Common denominator = 12</a:t>
             </a:r>
           </a:p>
         </p:txBody>
@@ -8555,28 +8559,30 @@
           <p:cNvPr id="17" name="">
             <a:extLst xmlns:a="http://schemas.openxmlformats.org/drawingml/2006/main">
               <a:ext uri="{FF2B5EF4-FFF2-40B4-BE49-F238E27FC236}">
-                <a16:creationId xmlns:a16="http://schemas.microsoft.com/office/drawing/2014/main" id="{0A8B1A9D-5603-44D7-A457-3430302387FD}"/>
-              </a:ext>
-            </a:extLst>
-          </p:cNvPr>
-          <p:cNvSpPr>
-            <a:spLocks xmlns:a="http://schemas.openxmlformats.org/drawingml/2006/main" noGrp="1"/>
-          </p:cNvSpPr>
-          <p:nvPr/>
-        </p:nvSpPr>
-        <p:spPr>
-          <a:xfrm xmlns:a="http://schemas.openxmlformats.org/drawingml/2006/main">
-            <a:off x="1000125" y="3733800"/>
-            <a:ext cx="476250" cy="476250"/>
-          </a:xfrm>
-          <a:prstGeom xmlns:a="http://schemas.openxmlformats.org/drawingml/2006/main" prst="ellipse">
+                <a16:creationId xmlns:a16="http://schemas.microsoft.com/office/drawing/2014/main" id="{32D29F82-0F58-4E61-B9C9-BFB907A9DF7F}"/>
+              </a:ext>
+            </a:extLst>
+          </p:cNvPr>
+          <p:cNvSpPr>
+            <a:spLocks xmlns:a="http://schemas.openxmlformats.org/drawingml/2006/main" noGrp="1"/>
+          </p:cNvSpPr>
+          <p:nvPr/>
+        </p:nvSpPr>
+        <p:spPr>
+          <a:xfrm xmlns:a="http://schemas.openxmlformats.org/drawingml/2006/main">
+            <a:off x="1714500" y="3476625"/>
+            <a:ext cx="9334500" cy="9525"/>
+          </a:xfrm>
+          <a:prstGeom xmlns:a="http://schemas.openxmlformats.org/drawingml/2006/main" prst="rect">
             <a:avLst/>
           </a:prstGeom>
           <a:solidFill xmlns:a="http://schemas.openxmlformats.org/drawingml/2006/main">
-            <a:srgbClr val="2C6E73"/>
+            <a:srgbClr val="D9E0E6"/>
           </a:solidFill>
           <a:ln xmlns:a="http://schemas.openxmlformats.org/drawingml/2006/main" w="0">
-            <a:noFill/>
+            <a:solidFill>
+              <a:srgbClr val="D9E0E6"/>
+            </a:solidFill>
           </a:ln>
         </p:spPr>
       </p:sp>
@@ -8585,19 +8591,19 @@
           <p:cNvPr id="18" name="">
             <a:extLst xmlns:a="http://schemas.openxmlformats.org/drawingml/2006/main">
               <a:ext uri="{FF2B5EF4-FFF2-40B4-BE49-F238E27FC236}">
-                <a16:creationId xmlns:a16="http://schemas.microsoft.com/office/drawing/2014/main" id="{EB73F60E-694D-4E65-8F47-4C86A79BB94F}"/>
-              </a:ext>
-            </a:extLst>
-          </p:cNvPr>
-          <p:cNvSpPr>
-            <a:spLocks xmlns:a="http://schemas.openxmlformats.org/drawingml/2006/main" noGrp="1"/>
-          </p:cNvSpPr>
-          <p:nvPr/>
-        </p:nvSpPr>
-        <p:spPr>
-          <a:xfrm xmlns:a="http://schemas.openxmlformats.org/drawingml/2006/main">
-            <a:off x="1000125" y="3762375"/>
-            <a:ext cx="476250" cy="419100"/>
+                <a16:creationId xmlns:a16="http://schemas.microsoft.com/office/drawing/2014/main" id="{EB319527-CB9E-4596-B058-80144D4EA15B}"/>
+              </a:ext>
+            </a:extLst>
+          </p:cNvPr>
+          <p:cNvSpPr>
+            <a:spLocks xmlns:a="http://schemas.openxmlformats.org/drawingml/2006/main" noGrp="1"/>
+          </p:cNvSpPr>
+          <p:nvPr/>
+        </p:nvSpPr>
+        <p:spPr>
+          <a:xfrm xmlns:a="http://schemas.openxmlformats.org/drawingml/2006/main">
+            <a:off x="1162050" y="3609975"/>
+            <a:ext cx="400050" cy="400050"/>
           </a:xfrm>
           <a:prstGeom xmlns:a="http://schemas.openxmlformats.org/drawingml/2006/main" prst="rect">
             <a:avLst/>
@@ -8614,9 +8620,9 @@
           <a:lstStyle xmlns:a="http://schemas.openxmlformats.org/drawingml/2006/main"/>
           <a:p xmlns:a="http://schemas.openxmlformats.org/drawingml/2006/main">
             <a:pPr algn="ctr">
-              <a:defRPr sz="1350" b="1">
-                <a:solidFill>
-                  <a:srgbClr val="FFFFFF"/>
+              <a:defRPr sz="1125" b="1">
+                <a:solidFill>
+                  <a:srgbClr val="2C6E73"/>
                 </a:solidFill>
                 <a:latin typeface="Arial"/>
                 <a:ea typeface="Arial"/>
@@ -8624,9 +8630,9 @@
               </a:defRPr>
             </a:pPr>
             <a:r>
-              <a:rPr sz="1350" b="1">
-                <a:solidFill>
-                  <a:srgbClr val="FFFFFF"/>
+              <a:rPr sz="1125" b="1">
+                <a:solidFill>
+                  <a:srgbClr val="2C6E73"/>
                 </a:solidFill>
                 <a:latin typeface="Arial"/>
                 <a:ea typeface="Arial"/>
@@ -8642,19 +8648,19 @@
           <p:cNvPr id="19" name="">
             <a:extLst xmlns:a="http://schemas.openxmlformats.org/drawingml/2006/main">
               <a:ext uri="{FF2B5EF4-FFF2-40B4-BE49-F238E27FC236}">
-                <a16:creationId xmlns:a16="http://schemas.microsoft.com/office/drawing/2014/main" id="{9D80866A-416A-448A-9066-72BCB2CEC77C}"/>
-              </a:ext>
-            </a:extLst>
-          </p:cNvPr>
-          <p:cNvSpPr>
-            <a:spLocks xmlns:a="http://schemas.openxmlformats.org/drawingml/2006/main" noGrp="1"/>
-          </p:cNvSpPr>
-          <p:nvPr/>
-        </p:nvSpPr>
-        <p:spPr>
-          <a:xfrm xmlns:a="http://schemas.openxmlformats.org/drawingml/2006/main">
-            <a:off x="1714500" y="3667125"/>
-            <a:ext cx="9429750" cy="609600"/>
+                <a16:creationId xmlns:a16="http://schemas.microsoft.com/office/drawing/2014/main" id="{7873855A-7081-4235-8BFA-DF07D19E4717}"/>
+              </a:ext>
+            </a:extLst>
+          </p:cNvPr>
+          <p:cNvSpPr>
+            <a:spLocks xmlns:a="http://schemas.openxmlformats.org/drawingml/2006/main" noGrp="1"/>
+          </p:cNvSpPr>
+          <p:nvPr/>
+        </p:nvSpPr>
+        <p:spPr>
+          <a:xfrm xmlns:a="http://schemas.openxmlformats.org/drawingml/2006/main">
+            <a:off x="1714500" y="3524250"/>
+            <a:ext cx="9525000" cy="638175"/>
           </a:xfrm>
           <a:prstGeom xmlns:a="http://schemas.openxmlformats.org/drawingml/2006/main" prst="rect">
             <a:avLst/>
@@ -8671,7 +8677,7 @@
           <a:lstStyle xmlns:a="http://schemas.openxmlformats.org/drawingml/2006/main"/>
           <a:p xmlns:a="http://schemas.openxmlformats.org/drawingml/2006/main">
             <a:pPr algn="l">
-              <a:defRPr sz="1500" b="0">
+              <a:defRPr sz="1575" b="0">
                 <a:solidFill>
                   <a:srgbClr val="17253A"/>
                 </a:solidFill>
@@ -8681,7 +8687,7 @@
               </a:defRPr>
             </a:pPr>
             <a:r>
-              <a:rPr sz="1500" b="0">
+              <a:rPr sz="1575" b="0">
                 <a:solidFill>
                   <a:srgbClr val="17253A"/>
                 </a:solidFill>
@@ -8689,7 +8695,7 @@
                 <a:ea typeface="Arial"/>
                 <a:cs typeface="Arial"/>
               </a:rPr>
-              <a:t>Complete the calculation: 1 7/12.</a:t>
+              <a:t>3/4 = 9/12     5/6 = 10/12</a:t>
             </a:r>
           </a:p>
         </p:txBody>
@@ -8699,28 +8705,30 @@
           <p:cNvPr id="20" name="">
             <a:extLst xmlns:a="http://schemas.openxmlformats.org/drawingml/2006/main">
               <a:ext uri="{FF2B5EF4-FFF2-40B4-BE49-F238E27FC236}">
-                <a16:creationId xmlns:a16="http://schemas.microsoft.com/office/drawing/2014/main" id="{E57F9FA0-E840-48A4-97FC-647C26201EB4}"/>
-              </a:ext>
-            </a:extLst>
-          </p:cNvPr>
-          <p:cNvSpPr>
-            <a:spLocks xmlns:a="http://schemas.openxmlformats.org/drawingml/2006/main" noGrp="1"/>
-          </p:cNvSpPr>
-          <p:nvPr/>
-        </p:nvSpPr>
-        <p:spPr>
-          <a:xfrm xmlns:a="http://schemas.openxmlformats.org/drawingml/2006/main">
-            <a:off x="1000125" y="4476750"/>
-            <a:ext cx="476250" cy="476250"/>
-          </a:xfrm>
-          <a:prstGeom xmlns:a="http://schemas.openxmlformats.org/drawingml/2006/main" prst="ellipse">
+                <a16:creationId xmlns:a16="http://schemas.microsoft.com/office/drawing/2014/main" id="{00A79657-9789-4A74-BC0E-FC15C8445BBA}"/>
+              </a:ext>
+            </a:extLst>
+          </p:cNvPr>
+          <p:cNvSpPr>
+            <a:spLocks xmlns:a="http://schemas.openxmlformats.org/drawingml/2006/main" noGrp="1"/>
+          </p:cNvSpPr>
+          <p:nvPr/>
+        </p:nvSpPr>
+        <p:spPr>
+          <a:xfrm xmlns:a="http://schemas.openxmlformats.org/drawingml/2006/main">
+            <a:off x="1714500" y="4181475"/>
+            <a:ext cx="9334500" cy="9525"/>
+          </a:xfrm>
+          <a:prstGeom xmlns:a="http://schemas.openxmlformats.org/drawingml/2006/main" prst="rect">
             <a:avLst/>
           </a:prstGeom>
           <a:solidFill xmlns:a="http://schemas.openxmlformats.org/drawingml/2006/main">
-            <a:srgbClr val="2C6E73"/>
+            <a:srgbClr val="D9E0E6"/>
           </a:solidFill>
           <a:ln xmlns:a="http://schemas.openxmlformats.org/drawingml/2006/main" w="0">
-            <a:noFill/>
+            <a:solidFill>
+              <a:srgbClr val="D9E0E6"/>
+            </a:solidFill>
           </a:ln>
         </p:spPr>
       </p:sp>
@@ -8729,19 +8737,19 @@
           <p:cNvPr id="21" name="">
             <a:extLst xmlns:a="http://schemas.openxmlformats.org/drawingml/2006/main">
               <a:ext uri="{FF2B5EF4-FFF2-40B4-BE49-F238E27FC236}">
-                <a16:creationId xmlns:a16="http://schemas.microsoft.com/office/drawing/2014/main" id="{6923ACCB-C64B-4073-AA77-A6EA7EAE8470}"/>
-              </a:ext>
-            </a:extLst>
-          </p:cNvPr>
-          <p:cNvSpPr>
-            <a:spLocks xmlns:a="http://schemas.openxmlformats.org/drawingml/2006/main" noGrp="1"/>
-          </p:cNvSpPr>
-          <p:nvPr/>
-        </p:nvSpPr>
-        <p:spPr>
-          <a:xfrm xmlns:a="http://schemas.openxmlformats.org/drawingml/2006/main">
-            <a:off x="1000125" y="4505325"/>
-            <a:ext cx="476250" cy="419100"/>
+                <a16:creationId xmlns:a16="http://schemas.microsoft.com/office/drawing/2014/main" id="{DECB2740-D779-4217-8D70-52B61BC3C594}"/>
+              </a:ext>
+            </a:extLst>
+          </p:cNvPr>
+          <p:cNvSpPr>
+            <a:spLocks xmlns:a="http://schemas.openxmlformats.org/drawingml/2006/main" noGrp="1"/>
+          </p:cNvSpPr>
+          <p:nvPr/>
+        </p:nvSpPr>
+        <p:spPr>
+          <a:xfrm xmlns:a="http://schemas.openxmlformats.org/drawingml/2006/main">
+            <a:off x="1162050" y="4314825"/>
+            <a:ext cx="400050" cy="400050"/>
           </a:xfrm>
           <a:prstGeom xmlns:a="http://schemas.openxmlformats.org/drawingml/2006/main" prst="rect">
             <a:avLst/>
@@ -8758,9 +8766,9 @@
           <a:lstStyle xmlns:a="http://schemas.openxmlformats.org/drawingml/2006/main"/>
           <a:p xmlns:a="http://schemas.openxmlformats.org/drawingml/2006/main">
             <a:pPr algn="ctr">
-              <a:defRPr sz="1350" b="1">
-                <a:solidFill>
-                  <a:srgbClr val="FFFFFF"/>
+              <a:defRPr sz="1125" b="1">
+                <a:solidFill>
+                  <a:srgbClr val="2C6E73"/>
                 </a:solidFill>
                 <a:latin typeface="Arial"/>
                 <a:ea typeface="Arial"/>
@@ -8768,9 +8776,9 @@
               </a:defRPr>
             </a:pPr>
             <a:r>
-              <a:rPr sz="1350" b="1">
-                <a:solidFill>
-                  <a:srgbClr val="FFFFFF"/>
+              <a:rPr sz="1125" b="1">
+                <a:solidFill>
+                  <a:srgbClr val="2C6E73"/>
                 </a:solidFill>
                 <a:latin typeface="Arial"/>
                 <a:ea typeface="Arial"/>
@@ -8786,19 +8794,19 @@
           <p:cNvPr id="22" name="">
             <a:extLst xmlns:a="http://schemas.openxmlformats.org/drawingml/2006/main">
               <a:ext uri="{FF2B5EF4-FFF2-40B4-BE49-F238E27FC236}">
-                <a16:creationId xmlns:a16="http://schemas.microsoft.com/office/drawing/2014/main" id="{1CE20AFA-FCD2-44DB-AE0F-1603E13563CD}"/>
-              </a:ext>
-            </a:extLst>
-          </p:cNvPr>
-          <p:cNvSpPr>
-            <a:spLocks xmlns:a="http://schemas.openxmlformats.org/drawingml/2006/main" noGrp="1"/>
-          </p:cNvSpPr>
-          <p:nvPr/>
-        </p:nvSpPr>
-        <p:spPr>
-          <a:xfrm xmlns:a="http://schemas.openxmlformats.org/drawingml/2006/main">
-            <a:off x="1714500" y="4410075"/>
-            <a:ext cx="9429750" cy="609600"/>
+                <a16:creationId xmlns:a16="http://schemas.microsoft.com/office/drawing/2014/main" id="{CBECF214-5F36-41F5-87BA-BD5082627166}"/>
+              </a:ext>
+            </a:extLst>
+          </p:cNvPr>
+          <p:cNvSpPr>
+            <a:spLocks xmlns:a="http://schemas.openxmlformats.org/drawingml/2006/main" noGrp="1"/>
+          </p:cNvSpPr>
+          <p:nvPr/>
+        </p:nvSpPr>
+        <p:spPr>
+          <a:xfrm xmlns:a="http://schemas.openxmlformats.org/drawingml/2006/main">
+            <a:off x="1714500" y="4229100"/>
+            <a:ext cx="9525000" cy="638175"/>
           </a:xfrm>
           <a:prstGeom xmlns:a="http://schemas.openxmlformats.org/drawingml/2006/main" prst="rect">
             <a:avLst/>
@@ -8815,9 +8823,9 @@
           <a:lstStyle xmlns:a="http://schemas.openxmlformats.org/drawingml/2006/main"/>
           <a:p xmlns:a="http://schemas.openxmlformats.org/drawingml/2006/main">
             <a:pPr algn="l">
-              <a:defRPr sz="1500" b="1">
-                <a:solidFill>
-                  <a:srgbClr val="2F785D"/>
+              <a:defRPr sz="1575" b="0">
+                <a:solidFill>
+                  <a:srgbClr val="17253A"/>
                 </a:solidFill>
                 <a:latin typeface="Arial"/>
                 <a:ea typeface="Arial"/>
@@ -8825,15 +8833,161 @@
               </a:defRPr>
             </a:pPr>
             <a:r>
-              <a:rPr sz="1500" b="1">
+              <a:rPr sz="1575" b="0">
+                <a:solidFill>
+                  <a:srgbClr val="17253A"/>
+                </a:solidFill>
+                <a:latin typeface="Arial"/>
+                <a:ea typeface="Arial"/>
+                <a:cs typeface="Arial"/>
+              </a:rPr>
+              <a:t>9/12 + 10/12 = 19/12</a:t>
+            </a:r>
+          </a:p>
+        </p:txBody>
+      </p:sp>
+      <p:sp>
+        <p:nvSpPr>
+          <p:cNvPr id="23" name="">
+            <a:extLst xmlns:a="http://schemas.openxmlformats.org/drawingml/2006/main">
+              <a:ext uri="{FF2B5EF4-FFF2-40B4-BE49-F238E27FC236}">
+                <a16:creationId xmlns:a16="http://schemas.microsoft.com/office/drawing/2014/main" id="{A341492F-59F9-46DA-99F0-B1711BA12F79}"/>
+              </a:ext>
+            </a:extLst>
+          </p:cNvPr>
+          <p:cNvSpPr>
+            <a:spLocks xmlns:a="http://schemas.openxmlformats.org/drawingml/2006/main" noGrp="1"/>
+          </p:cNvSpPr>
+          <p:nvPr/>
+        </p:nvSpPr>
+        <p:spPr>
+          <a:xfrm xmlns:a="http://schemas.openxmlformats.org/drawingml/2006/main">
+            <a:off x="1714500" y="4886325"/>
+            <a:ext cx="9334500" cy="9525"/>
+          </a:xfrm>
+          <a:prstGeom xmlns:a="http://schemas.openxmlformats.org/drawingml/2006/main" prst="rect">
+            <a:avLst/>
+          </a:prstGeom>
+          <a:solidFill xmlns:a="http://schemas.openxmlformats.org/drawingml/2006/main">
+            <a:srgbClr val="D9E0E6"/>
+          </a:solidFill>
+          <a:ln xmlns:a="http://schemas.openxmlformats.org/drawingml/2006/main" w="0">
+            <a:solidFill>
+              <a:srgbClr val="D9E0E6"/>
+            </a:solidFill>
+          </a:ln>
+        </p:spPr>
+      </p:sp>
+      <p:sp>
+        <p:nvSpPr>
+          <p:cNvPr id="24" name="">
+            <a:extLst xmlns:a="http://schemas.openxmlformats.org/drawingml/2006/main">
+              <a:ext uri="{FF2B5EF4-FFF2-40B4-BE49-F238E27FC236}">
+                <a16:creationId xmlns:a16="http://schemas.microsoft.com/office/drawing/2014/main" id="{EBB9C5EF-B808-441D-B2B8-8F9CCA018BF9}"/>
+              </a:ext>
+            </a:extLst>
+          </p:cNvPr>
+          <p:cNvSpPr>
+            <a:spLocks xmlns:a="http://schemas.openxmlformats.org/drawingml/2006/main" noGrp="1"/>
+          </p:cNvSpPr>
+          <p:nvPr/>
+        </p:nvSpPr>
+        <p:spPr>
+          <a:xfrm xmlns:a="http://schemas.openxmlformats.org/drawingml/2006/main">
+            <a:off x="1162050" y="5019675"/>
+            <a:ext cx="400050" cy="400050"/>
+          </a:xfrm>
+          <a:prstGeom xmlns:a="http://schemas.openxmlformats.org/drawingml/2006/main" prst="rect">
+            <a:avLst/>
+          </a:prstGeom>
+          <a:noFill xmlns:a="http://schemas.openxmlformats.org/drawingml/2006/main"/>
+          <a:ln xmlns:a="http://schemas.openxmlformats.org/drawingml/2006/main" w="0">
+            <a:noFill/>
+          </a:ln>
+        </p:spPr>
+        <p:txBody>
+          <a:bodyPr xmlns:a="http://schemas.openxmlformats.org/drawingml/2006/main" anchor="ctr">
+            <a:normAutofit fontScale="100000"/>
+          </a:bodyPr>
+          <a:lstStyle xmlns:a="http://schemas.openxmlformats.org/drawingml/2006/main"/>
+          <a:p xmlns:a="http://schemas.openxmlformats.org/drawingml/2006/main">
+            <a:pPr algn="ctr">
+              <a:defRPr sz="1125" b="1">
                 <a:solidFill>
                   <a:srgbClr val="2F785D"/>
                 </a:solidFill>
                 <a:latin typeface="Arial"/>
                 <a:ea typeface="Arial"/>
                 <a:cs typeface="Arial"/>
+              </a:defRPr>
+            </a:pPr>
+            <a:r>
+              <a:rPr sz="1125" b="1">
+                <a:solidFill>
+                  <a:srgbClr val="2F785D"/>
+                </a:solidFill>
+                <a:latin typeface="Arial"/>
+                <a:ea typeface="Arial"/>
+                <a:cs typeface="Arial"/>
               </a:rPr>
-              <a:t>Check the result: Simplify and convert the answer when appropriate.</a:t>
+              <a:t>5</a:t>
+            </a:r>
+          </a:p>
+        </p:txBody>
+      </p:sp>
+      <p:sp>
+        <p:nvSpPr>
+          <p:cNvPr id="25" name="">
+            <a:extLst xmlns:a="http://schemas.openxmlformats.org/drawingml/2006/main">
+              <a:ext uri="{FF2B5EF4-FFF2-40B4-BE49-F238E27FC236}">
+                <a16:creationId xmlns:a16="http://schemas.microsoft.com/office/drawing/2014/main" id="{685ECCB6-6DDF-4399-BC46-A578501D4FA6}"/>
+              </a:ext>
+            </a:extLst>
+          </p:cNvPr>
+          <p:cNvSpPr>
+            <a:spLocks xmlns:a="http://schemas.openxmlformats.org/drawingml/2006/main" noGrp="1"/>
+          </p:cNvSpPr>
+          <p:nvPr/>
+        </p:nvSpPr>
+        <p:spPr>
+          <a:xfrm xmlns:a="http://schemas.openxmlformats.org/drawingml/2006/main">
+            <a:off x="1714500" y="4933950"/>
+            <a:ext cx="9525000" cy="638175"/>
+          </a:xfrm>
+          <a:prstGeom xmlns:a="http://schemas.openxmlformats.org/drawingml/2006/main" prst="rect">
+            <a:avLst/>
+          </a:prstGeom>
+          <a:noFill xmlns:a="http://schemas.openxmlformats.org/drawingml/2006/main"/>
+          <a:ln xmlns:a="http://schemas.openxmlformats.org/drawingml/2006/main" w="0">
+            <a:noFill/>
+          </a:ln>
+        </p:spPr>
+        <p:txBody>
+          <a:bodyPr xmlns:a="http://schemas.openxmlformats.org/drawingml/2006/main" anchor="ctr">
+            <a:normAutofit fontScale="100000"/>
+          </a:bodyPr>
+          <a:lstStyle xmlns:a="http://schemas.openxmlformats.org/drawingml/2006/main"/>
+          <a:p xmlns:a="http://schemas.openxmlformats.org/drawingml/2006/main">
+            <a:pPr algn="l">
+              <a:defRPr sz="1575" b="1">
+                <a:solidFill>
+                  <a:srgbClr val="2F785D"/>
+                </a:solidFill>
+                <a:latin typeface="Arial"/>
+                <a:ea typeface="Arial"/>
+                <a:cs typeface="Arial"/>
+              </a:defRPr>
+            </a:pPr>
+            <a:r>
+              <a:rPr sz="1575" b="1">
+                <a:solidFill>
+                  <a:srgbClr val="2F785D"/>
+                </a:solidFill>
+                <a:latin typeface="Arial"/>
+                <a:ea typeface="Arial"/>
+                <a:cs typeface="Arial"/>
+              </a:rPr>
+              <a:t>19/12 = 1 7/12</a:t>
             </a:r>
           </a:p>
         </p:txBody>
@@ -8841,7 +8995,7 @@
     </p:spTree>
     <p:extLst>
       <p:ext uri="{BB962C8B-B14F-4D97-AF65-F5344CB8AC3E}">
-        <p14:creationId xmlns:p14="http://schemas.microsoft.com/office/powerpoint/2010/main" val="939755184"/>
+        <p14:creationId xmlns:p14="http://schemas.microsoft.com/office/powerpoint/2010/main" val="200589536"/>
       </p:ext>
     </p:extLst>
   </p:cSld>
@@ -9078,6 +9232,51 @@
                       </p:childTnLst>
                     </p:cTn>
                   </p:par>
+                  <p:par>
+                    <p:cTn id="23" fill="hold">
+                      <p:stCondLst>
+                        <p:cond delay="indefinite"/>
+                      </p:stCondLst>
+                      <p:childTnLst>
+                        <p:par>
+                          <p:cTn id="24" fill="hold">
+                            <p:stCondLst>
+                              <p:cond delay="0"/>
+                            </p:stCondLst>
+                            <p:childTnLst>
+                              <p:par>
+                                <p:cTn id="25" presetID="1" presetClass="entr" presetSubtype="0" fill="hold" grpId="0" nodeType="clickEffect">
+                                  <p:stCondLst>
+                                    <p:cond delay="0"/>
+                                  </p:stCondLst>
+                                  <p:childTnLst>
+                                    <p:set>
+                                      <p:cBhvr>
+                                        <p:cTn id="26" dur="1" fill="hold">
+                                          <p:stCondLst>
+                                            <p:cond delay="0"/>
+                                          </p:stCondLst>
+                                        </p:cTn>
+                                        <p:tgtEl>
+                                          <p:spTgt spid="25"/>
+                                        </p:tgtEl>
+                                        <p:attrNameLst>
+                                          <p:attrName>style.visibility</p:attrName>
+                                        </p:attrNameLst>
+                                      </p:cBhvr>
+                                      <p:to>
+                                        <p:strVal val="visible"/>
+                                      </p:to>
+                                    </p:set>
+                                  </p:childTnLst>
+                                </p:cTn>
+                              </p:par>
+                            </p:childTnLst>
+                          </p:cTn>
+                        </p:par>
+                      </p:childTnLst>
+                    </p:cTn>
+                  </p:par>
                 </p:childTnLst>
               </p:cTn>
               <p:prevCondLst>
@@ -9105,6 +9304,7 @@
       <p:bldP spid="16" grpId="0"/>
       <p:bldP spid="19" grpId="0"/>
       <p:bldP spid="22" grpId="0"/>
+      <p:bldP spid="25" grpId="0"/>
     </p:bldLst>
   </p:timing>
 </p:sld>
@@ -9134,7 +9334,7 @@
           <p:cNvPr id="15" name="">
             <a:extLst xmlns:a="http://schemas.openxmlformats.org/drawingml/2006/main">
               <a:ext uri="{FF2B5EF4-FFF2-40B4-BE49-F238E27FC236}">
-                <a16:creationId xmlns:a16="http://schemas.microsoft.com/office/drawing/2014/main" id="{38EE45D3-5D26-4EEB-A9E5-2D81FFA52B3A}"/>
+                <a16:creationId xmlns:a16="http://schemas.microsoft.com/office/drawing/2014/main" id="{C933E2E1-1AF0-4051-9B67-870B32A384AB}"/>
               </a:ext>
             </a:extLst>
           </p:cNvPr>
@@ -9166,7 +9366,7 @@
           <p:cNvPr id="2" name="">
             <a:extLst xmlns:a="http://schemas.openxmlformats.org/drawingml/2006/main">
               <a:ext uri="{FF2B5EF4-FFF2-40B4-BE49-F238E27FC236}">
-                <a16:creationId xmlns:a16="http://schemas.microsoft.com/office/drawing/2014/main" id="{13B352DC-D5B0-4634-8DD9-ED86D9920D55}"/>
+                <a16:creationId xmlns:a16="http://schemas.microsoft.com/office/drawing/2014/main" id="{BBC1BBD7-D9D8-4248-B4B5-F3E509348711}"/>
               </a:ext>
             </a:extLst>
           </p:cNvPr>
@@ -9223,7 +9423,7 @@
           <p:cNvPr id="3" name="">
             <a:extLst xmlns:a="http://schemas.openxmlformats.org/drawingml/2006/main">
               <a:ext uri="{FF2B5EF4-FFF2-40B4-BE49-F238E27FC236}">
-                <a16:creationId xmlns:a16="http://schemas.microsoft.com/office/drawing/2014/main" id="{AEABF54B-8755-4C6B-A131-385653873485}"/>
+                <a16:creationId xmlns:a16="http://schemas.microsoft.com/office/drawing/2014/main" id="{006A6DFF-C75D-4BB5-860F-09B6B502F0D1}"/>
               </a:ext>
             </a:extLst>
           </p:cNvPr>
@@ -9255,7 +9455,7 @@
           <p:cNvPr id="4" name="">
             <a:extLst xmlns:a="http://schemas.openxmlformats.org/drawingml/2006/main">
               <a:ext uri="{FF2B5EF4-FFF2-40B4-BE49-F238E27FC236}">
-                <a16:creationId xmlns:a16="http://schemas.microsoft.com/office/drawing/2014/main" id="{6679DF72-D1E7-4572-B5FB-0EE19547CC11}"/>
+                <a16:creationId xmlns:a16="http://schemas.microsoft.com/office/drawing/2014/main" id="{AF2E8A6B-CEA0-4E10-9A0F-CBB67B2AA662}"/>
               </a:ext>
             </a:extLst>
           </p:cNvPr>
@@ -9312,7 +9512,7 @@
           <p:cNvPr id="5" name="">
             <a:extLst xmlns:a="http://schemas.openxmlformats.org/drawingml/2006/main">
               <a:ext uri="{FF2B5EF4-FFF2-40B4-BE49-F238E27FC236}">
-                <a16:creationId xmlns:a16="http://schemas.microsoft.com/office/drawing/2014/main" id="{82A43168-5F21-46F0-ADAC-3727AE022045}"/>
+                <a16:creationId xmlns:a16="http://schemas.microsoft.com/office/drawing/2014/main" id="{73F3B61B-6E0D-4035-8C1F-2ED5EA234055}"/>
               </a:ext>
             </a:extLst>
           </p:cNvPr>
@@ -9369,7 +9569,7 @@
           <p:cNvPr id="6" name="">
             <a:extLst xmlns:a="http://schemas.openxmlformats.org/drawingml/2006/main">
               <a:ext uri="{FF2B5EF4-FFF2-40B4-BE49-F238E27FC236}">
-                <a16:creationId xmlns:a16="http://schemas.microsoft.com/office/drawing/2014/main" id="{41399DEA-F415-4A17-8C61-727E30B10699}"/>
+                <a16:creationId xmlns:a16="http://schemas.microsoft.com/office/drawing/2014/main" id="{2D2DFA5F-89E8-4527-8EF5-A59CD0DE7F0E}"/>
               </a:ext>
             </a:extLst>
           </p:cNvPr>
@@ -9426,7 +9626,7 @@
           <p:cNvPr id="7" name="">
             <a:extLst xmlns:a="http://schemas.openxmlformats.org/drawingml/2006/main">
               <a:ext uri="{FF2B5EF4-FFF2-40B4-BE49-F238E27FC236}">
-                <a16:creationId xmlns:a16="http://schemas.microsoft.com/office/drawing/2014/main" id="{D7D0CA29-A57B-4F49-8655-EBF681449299}"/>
+                <a16:creationId xmlns:a16="http://schemas.microsoft.com/office/drawing/2014/main" id="{41928B4F-AA68-402B-9436-C7B601245A3A}"/>
               </a:ext>
             </a:extLst>
           </p:cNvPr>
@@ -9458,7 +9658,7 @@
           <p:cNvPr id="8" name="">
             <a:extLst xmlns:a="http://schemas.openxmlformats.org/drawingml/2006/main">
               <a:ext uri="{FF2B5EF4-FFF2-40B4-BE49-F238E27FC236}">
-                <a16:creationId xmlns:a16="http://schemas.microsoft.com/office/drawing/2014/main" id="{5A3D5347-F35A-4C33-B215-7D2E416D24CE}"/>
+                <a16:creationId xmlns:a16="http://schemas.microsoft.com/office/drawing/2014/main" id="{A9739F8A-0B30-4CEF-9AE5-0C817D1DDDDD}"/>
               </a:ext>
             </a:extLst>
           </p:cNvPr>
@@ -9515,7 +9715,7 @@
           <p:cNvPr id="9" name="">
             <a:extLst xmlns:a="http://schemas.openxmlformats.org/drawingml/2006/main">
               <a:ext uri="{FF2B5EF4-FFF2-40B4-BE49-F238E27FC236}">
-                <a16:creationId xmlns:a16="http://schemas.microsoft.com/office/drawing/2014/main" id="{97028A71-6BD3-48DD-A7AF-C1BF1F2D3C3B}"/>
+                <a16:creationId xmlns:a16="http://schemas.microsoft.com/office/drawing/2014/main" id="{C7980836-3E96-4429-A2C9-A94A3007371A}"/>
               </a:ext>
             </a:extLst>
           </p:cNvPr>
@@ -9572,7 +9772,7 @@
           <p:cNvPr id="10" name="">
             <a:extLst xmlns:a="http://schemas.openxmlformats.org/drawingml/2006/main">
               <a:ext uri="{FF2B5EF4-FFF2-40B4-BE49-F238E27FC236}">
-                <a16:creationId xmlns:a16="http://schemas.microsoft.com/office/drawing/2014/main" id="{27ACD960-83C0-49D1-9D9A-44EA0F45E818}"/>
+                <a16:creationId xmlns:a16="http://schemas.microsoft.com/office/drawing/2014/main" id="{779A8CD7-A30E-4837-8A9A-167ABA054069}"/>
               </a:ext>
             </a:extLst>
           </p:cNvPr>
@@ -9629,7 +9829,7 @@
           <p:cNvPr id="11" name="">
             <a:extLst xmlns:a="http://schemas.openxmlformats.org/drawingml/2006/main">
               <a:ext uri="{FF2B5EF4-FFF2-40B4-BE49-F238E27FC236}">
-                <a16:creationId xmlns:a16="http://schemas.microsoft.com/office/drawing/2014/main" id="{84140EC6-F1AB-43B3-B899-0B68FD88F0FC}"/>
+                <a16:creationId xmlns:a16="http://schemas.microsoft.com/office/drawing/2014/main" id="{604F0893-5FB5-4872-9B43-204C335CBF73}"/>
               </a:ext>
             </a:extLst>
           </p:cNvPr>
@@ -9686,7 +9886,7 @@
           <p:cNvPr id="12" name="">
             <a:extLst xmlns:a="http://schemas.openxmlformats.org/drawingml/2006/main">
               <a:ext uri="{FF2B5EF4-FFF2-40B4-BE49-F238E27FC236}">
-                <a16:creationId xmlns:a16="http://schemas.microsoft.com/office/drawing/2014/main" id="{A8521111-3C83-4F25-91A2-1ED880585804}"/>
+                <a16:creationId xmlns:a16="http://schemas.microsoft.com/office/drawing/2014/main" id="{8EC5CBD3-2BA1-4797-878F-8A46A44AFC17}"/>
               </a:ext>
             </a:extLst>
           </p:cNvPr>
@@ -9718,7 +9918,7 @@
           <p:cNvPr id="13" name="">
             <a:extLst xmlns:a="http://schemas.openxmlformats.org/drawingml/2006/main">
               <a:ext uri="{FF2B5EF4-FFF2-40B4-BE49-F238E27FC236}">
-                <a16:creationId xmlns:a16="http://schemas.microsoft.com/office/drawing/2014/main" id="{D5409FF9-1E49-4189-8D71-F4695B9049A8}"/>
+                <a16:creationId xmlns:a16="http://schemas.microsoft.com/office/drawing/2014/main" id="{8DEA23D0-41FC-44E2-B991-576BDF133249}"/>
               </a:ext>
             </a:extLst>
           </p:cNvPr>
@@ -9775,7 +9975,7 @@
           <p:cNvPr id="14" name="">
             <a:extLst xmlns:a="http://schemas.openxmlformats.org/drawingml/2006/main">
               <a:ext uri="{FF2B5EF4-FFF2-40B4-BE49-F238E27FC236}">
-                <a16:creationId xmlns:a16="http://schemas.microsoft.com/office/drawing/2014/main" id="{FAAED930-9400-454E-8A92-12182A5D1B75}"/>
+                <a16:creationId xmlns:a16="http://schemas.microsoft.com/office/drawing/2014/main" id="{5E59567C-8C16-4FAC-8B18-394161EE79E7}"/>
               </a:ext>
             </a:extLst>
           </p:cNvPr>
@@ -9830,7 +10030,7 @@
     </p:spTree>
     <p:extLst>
       <p:ext uri="{BB962C8B-B14F-4D97-AF65-F5344CB8AC3E}">
-        <p14:creationId xmlns:p14="http://schemas.microsoft.com/office/powerpoint/2010/main" val="341528747"/>
+        <p14:creationId xmlns:p14="http://schemas.microsoft.com/office/powerpoint/2010/main" val="822688823"/>
       </p:ext>
     </p:extLst>
   </p:cSld>
@@ -10031,7 +10231,7 @@
           <p:cNvPr id="16" name="">
             <a:extLst xmlns:a="http://schemas.openxmlformats.org/drawingml/2006/main">
               <a:ext uri="{FF2B5EF4-FFF2-40B4-BE49-F238E27FC236}">
-                <a16:creationId xmlns:a16="http://schemas.microsoft.com/office/drawing/2014/main" id="{D776D769-8B50-4347-978B-ABD0F27A06F4}"/>
+                <a16:creationId xmlns:a16="http://schemas.microsoft.com/office/drawing/2014/main" id="{EC7ACF43-6C6B-458C-8366-E07A6CED2898}"/>
               </a:ext>
             </a:extLst>
           </p:cNvPr>
@@ -10063,7 +10263,7 @@
           <p:cNvPr id="2" name="">
             <a:extLst xmlns:a="http://schemas.openxmlformats.org/drawingml/2006/main">
               <a:ext uri="{FF2B5EF4-FFF2-40B4-BE49-F238E27FC236}">
-                <a16:creationId xmlns:a16="http://schemas.microsoft.com/office/drawing/2014/main" id="{48D02298-AAED-4C8F-B7F0-1E6C099EDEF4}"/>
+                <a16:creationId xmlns:a16="http://schemas.microsoft.com/office/drawing/2014/main" id="{F2050347-4D05-43FC-BD2A-4B6963528D8B}"/>
               </a:ext>
             </a:extLst>
           </p:cNvPr>
@@ -10120,7 +10320,7 @@
           <p:cNvPr id="3" name="">
             <a:extLst xmlns:a="http://schemas.openxmlformats.org/drawingml/2006/main">
               <a:ext uri="{FF2B5EF4-FFF2-40B4-BE49-F238E27FC236}">
-                <a16:creationId xmlns:a16="http://schemas.microsoft.com/office/drawing/2014/main" id="{434016ED-DE74-4C0C-97AE-5451D20EC589}"/>
+                <a16:creationId xmlns:a16="http://schemas.microsoft.com/office/drawing/2014/main" id="{D42EEF61-B17E-4757-8255-0C2F5323E9C4}"/>
               </a:ext>
             </a:extLst>
           </p:cNvPr>
@@ -10152,7 +10352,7 @@
           <p:cNvPr id="4" name="">
             <a:extLst xmlns:a="http://schemas.openxmlformats.org/drawingml/2006/main">
               <a:ext uri="{FF2B5EF4-FFF2-40B4-BE49-F238E27FC236}">
-                <a16:creationId xmlns:a16="http://schemas.microsoft.com/office/drawing/2014/main" id="{7D2483F9-1987-43FE-8096-187F909AD08C}"/>
+                <a16:creationId xmlns:a16="http://schemas.microsoft.com/office/drawing/2014/main" id="{2E491BE1-14E5-49FB-AEA9-3D96E4A9B931}"/>
               </a:ext>
             </a:extLst>
           </p:cNvPr>
@@ -10209,7 +10409,7 @@
           <p:cNvPr id="5" name="">
             <a:extLst xmlns:a="http://schemas.openxmlformats.org/drawingml/2006/main">
               <a:ext uri="{FF2B5EF4-FFF2-40B4-BE49-F238E27FC236}">
-                <a16:creationId xmlns:a16="http://schemas.microsoft.com/office/drawing/2014/main" id="{8A2BAB9B-50CC-4EAB-9CB1-55BA5EF8C668}"/>
+                <a16:creationId xmlns:a16="http://schemas.microsoft.com/office/drawing/2014/main" id="{68084DC1-BE35-4F47-ABE2-670591F03581}"/>
               </a:ext>
             </a:extLst>
           </p:cNvPr>
@@ -10266,7 +10466,7 @@
           <p:cNvPr id="6" name="">
             <a:extLst xmlns:a="http://schemas.openxmlformats.org/drawingml/2006/main">
               <a:ext uri="{FF2B5EF4-FFF2-40B4-BE49-F238E27FC236}">
-                <a16:creationId xmlns:a16="http://schemas.microsoft.com/office/drawing/2014/main" id="{A5278308-01F8-4AF2-A085-C6F808B7CBA1}"/>
+                <a16:creationId xmlns:a16="http://schemas.microsoft.com/office/drawing/2014/main" id="{9A986F15-4733-49DA-884F-4E7829D50FE7}"/>
               </a:ext>
             </a:extLst>
           </p:cNvPr>
@@ -10323,7 +10523,7 @@
           <p:cNvPr id="7" name="">
             <a:extLst xmlns:a="http://schemas.openxmlformats.org/drawingml/2006/main">
               <a:ext uri="{FF2B5EF4-FFF2-40B4-BE49-F238E27FC236}">
-                <a16:creationId xmlns:a16="http://schemas.microsoft.com/office/drawing/2014/main" id="{AB585CD3-411F-4327-AC39-E52560DEC005}"/>
+                <a16:creationId xmlns:a16="http://schemas.microsoft.com/office/drawing/2014/main" id="{936EB4B1-3C81-46AE-AB50-A14CF0AEC90A}"/>
               </a:ext>
             </a:extLst>
           </p:cNvPr>
@@ -10355,7 +10555,7 @@
           <p:cNvPr id="8" name="">
             <a:extLst xmlns:a="http://schemas.openxmlformats.org/drawingml/2006/main">
               <a:ext uri="{FF2B5EF4-FFF2-40B4-BE49-F238E27FC236}">
-                <a16:creationId xmlns:a16="http://schemas.microsoft.com/office/drawing/2014/main" id="{45CCBF8C-2F28-4F7B-B65C-DB8EB7752930}"/>
+                <a16:creationId xmlns:a16="http://schemas.microsoft.com/office/drawing/2014/main" id="{02A91E04-E0B7-4977-920F-4FDDAC6A8A6A}"/>
               </a:ext>
             </a:extLst>
           </p:cNvPr>
@@ -10412,7 +10612,7 @@
           <p:cNvPr id="9" name="">
             <a:extLst xmlns:a="http://schemas.openxmlformats.org/drawingml/2006/main">
               <a:ext uri="{FF2B5EF4-FFF2-40B4-BE49-F238E27FC236}">
-                <a16:creationId xmlns:a16="http://schemas.microsoft.com/office/drawing/2014/main" id="{7CC94B19-125D-4614-BC8F-7F5F3F514A46}"/>
+                <a16:creationId xmlns:a16="http://schemas.microsoft.com/office/drawing/2014/main" id="{2E83D773-D1C3-4E90-8172-F7116FE55430}"/>
               </a:ext>
             </a:extLst>
           </p:cNvPr>
@@ -10469,7 +10669,7 @@
           <p:cNvPr id="10" name="">
             <a:extLst xmlns:a="http://schemas.openxmlformats.org/drawingml/2006/main">
               <a:ext uri="{FF2B5EF4-FFF2-40B4-BE49-F238E27FC236}">
-                <a16:creationId xmlns:a16="http://schemas.microsoft.com/office/drawing/2014/main" id="{0FD319D2-E7CC-461E-A6C3-DC969C05D63E}"/>
+                <a16:creationId xmlns:a16="http://schemas.microsoft.com/office/drawing/2014/main" id="{806DC48E-6843-46B2-B4FE-90C67DDD790A}"/>
               </a:ext>
             </a:extLst>
           </p:cNvPr>
@@ -10526,7 +10726,7 @@
           <p:cNvPr id="11" name="">
             <a:extLst xmlns:a="http://schemas.openxmlformats.org/drawingml/2006/main">
               <a:ext uri="{FF2B5EF4-FFF2-40B4-BE49-F238E27FC236}">
-                <a16:creationId xmlns:a16="http://schemas.microsoft.com/office/drawing/2014/main" id="{258A52BE-41F4-44A1-B48B-A20967275694}"/>
+                <a16:creationId xmlns:a16="http://schemas.microsoft.com/office/drawing/2014/main" id="{348F18F9-3404-40FE-8396-3F007686CDEB}"/>
               </a:ext>
             </a:extLst>
           </p:cNvPr>
@@ -10583,7 +10783,7 @@
           <p:cNvPr id="12" name="">
             <a:extLst xmlns:a="http://schemas.openxmlformats.org/drawingml/2006/main">
               <a:ext uri="{FF2B5EF4-FFF2-40B4-BE49-F238E27FC236}">
-                <a16:creationId xmlns:a16="http://schemas.microsoft.com/office/drawing/2014/main" id="{DC62BF95-A8AD-4D5D-97DA-52C20AAA94A9}"/>
+                <a16:creationId xmlns:a16="http://schemas.microsoft.com/office/drawing/2014/main" id="{515D3995-0F61-46A3-B767-F020EF90B246}"/>
               </a:ext>
             </a:extLst>
           </p:cNvPr>
@@ -10640,7 +10840,7 @@
           <p:cNvPr id="13" name="">
             <a:extLst xmlns:a="http://schemas.openxmlformats.org/drawingml/2006/main">
               <a:ext uri="{FF2B5EF4-FFF2-40B4-BE49-F238E27FC236}">
-                <a16:creationId xmlns:a16="http://schemas.microsoft.com/office/drawing/2014/main" id="{9A772624-BBD0-4AAB-9265-FC0F95408582}"/>
+                <a16:creationId xmlns:a16="http://schemas.microsoft.com/office/drawing/2014/main" id="{A35068C3-5DA1-400E-9F84-B039A8A01E8C}"/>
               </a:ext>
             </a:extLst>
           </p:cNvPr>
@@ -10697,7 +10897,7 @@
           <p:cNvPr id="14" name="">
             <a:extLst xmlns:a="http://schemas.openxmlformats.org/drawingml/2006/main">
               <a:ext uri="{FF2B5EF4-FFF2-40B4-BE49-F238E27FC236}">
-                <a16:creationId xmlns:a16="http://schemas.microsoft.com/office/drawing/2014/main" id="{15F1EE28-3DB8-485B-BF73-11563CF912D8}"/>
+                <a16:creationId xmlns:a16="http://schemas.microsoft.com/office/drawing/2014/main" id="{C3F02C4F-8D9B-4C80-86AF-AEA11F22805F}"/>
               </a:ext>
             </a:extLst>
           </p:cNvPr>
@@ -10754,7 +10954,7 @@
           <p:cNvPr id="15" name="">
             <a:extLst xmlns:a="http://schemas.openxmlformats.org/drawingml/2006/main">
               <a:ext uri="{FF2B5EF4-FFF2-40B4-BE49-F238E27FC236}">
-                <a16:creationId xmlns:a16="http://schemas.microsoft.com/office/drawing/2014/main" id="{F4392D73-6B48-4A73-B47D-2ADB329A80ED}"/>
+                <a16:creationId xmlns:a16="http://schemas.microsoft.com/office/drawing/2014/main" id="{99C00EA8-B263-4168-8FE3-8857B0B8D480}"/>
               </a:ext>
             </a:extLst>
           </p:cNvPr>
@@ -10809,7 +11009,7 @@
     </p:spTree>
     <p:extLst>
       <p:ext uri="{BB962C8B-B14F-4D97-AF65-F5344CB8AC3E}">
-        <p14:creationId xmlns:p14="http://schemas.microsoft.com/office/powerpoint/2010/main" val="1163971793"/>
+        <p14:creationId xmlns:p14="http://schemas.microsoft.com/office/powerpoint/2010/main" val="1665721010"/>
       </p:ext>
     </p:extLst>
   </p:cSld>
@@ -10964,7 +11164,7 @@
           <p:cNvPr id="16" name="">
             <a:extLst xmlns:a="http://schemas.openxmlformats.org/drawingml/2006/main">
               <a:ext uri="{FF2B5EF4-FFF2-40B4-BE49-F238E27FC236}">
-                <a16:creationId xmlns:a16="http://schemas.microsoft.com/office/drawing/2014/main" id="{EB37F83F-CF73-44B5-87F4-94A7BC72DAF2}"/>
+                <a16:creationId xmlns:a16="http://schemas.microsoft.com/office/drawing/2014/main" id="{CE1D54A7-07B4-4FEC-B752-B2D3C45D031F}"/>
               </a:ext>
             </a:extLst>
           </p:cNvPr>
@@ -10996,7 +11196,7 @@
           <p:cNvPr id="2" name="">
             <a:extLst xmlns:a="http://schemas.openxmlformats.org/drawingml/2006/main">
               <a:ext uri="{FF2B5EF4-FFF2-40B4-BE49-F238E27FC236}">
-                <a16:creationId xmlns:a16="http://schemas.microsoft.com/office/drawing/2014/main" id="{59E72B2F-C658-492D-9C6C-973CBA3459F8}"/>
+                <a16:creationId xmlns:a16="http://schemas.microsoft.com/office/drawing/2014/main" id="{F0F621AE-81AD-4E72-8BC1-A411B4D3A911}"/>
               </a:ext>
             </a:extLst>
           </p:cNvPr>
@@ -11053,7 +11253,7 @@
           <p:cNvPr id="3" name="">
             <a:extLst xmlns:a="http://schemas.openxmlformats.org/drawingml/2006/main">
               <a:ext uri="{FF2B5EF4-FFF2-40B4-BE49-F238E27FC236}">
-                <a16:creationId xmlns:a16="http://schemas.microsoft.com/office/drawing/2014/main" id="{CB1B1C1F-507D-404B-AA3A-319D0573FCAD}"/>
+                <a16:creationId xmlns:a16="http://schemas.microsoft.com/office/drawing/2014/main" id="{E2538EAF-E1CE-4EE8-A972-0470931BC4BF}"/>
               </a:ext>
             </a:extLst>
           </p:cNvPr>
@@ -11085,7 +11285,7 @@
           <p:cNvPr id="4" name="">
             <a:extLst xmlns:a="http://schemas.openxmlformats.org/drawingml/2006/main">
               <a:ext uri="{FF2B5EF4-FFF2-40B4-BE49-F238E27FC236}">
-                <a16:creationId xmlns:a16="http://schemas.microsoft.com/office/drawing/2014/main" id="{4211A88D-64F8-4F75-A8AA-8B8E17FE57BA}"/>
+                <a16:creationId xmlns:a16="http://schemas.microsoft.com/office/drawing/2014/main" id="{A831F658-5E3E-49F0-A435-B412224709F1}"/>
               </a:ext>
             </a:extLst>
           </p:cNvPr>
@@ -11142,7 +11342,7 @@
           <p:cNvPr id="5" name="">
             <a:extLst xmlns:a="http://schemas.openxmlformats.org/drawingml/2006/main">
               <a:ext uri="{FF2B5EF4-FFF2-40B4-BE49-F238E27FC236}">
-                <a16:creationId xmlns:a16="http://schemas.microsoft.com/office/drawing/2014/main" id="{6B630B86-F533-4ABA-A0F2-EF1C391D383A}"/>
+                <a16:creationId xmlns:a16="http://schemas.microsoft.com/office/drawing/2014/main" id="{BDF55084-205E-4850-8D0B-3FE77B778424}"/>
               </a:ext>
             </a:extLst>
           </p:cNvPr>
@@ -11199,7 +11399,7 @@
           <p:cNvPr id="6" name="">
             <a:extLst xmlns:a="http://schemas.openxmlformats.org/drawingml/2006/main">
               <a:ext uri="{FF2B5EF4-FFF2-40B4-BE49-F238E27FC236}">
-                <a16:creationId xmlns:a16="http://schemas.microsoft.com/office/drawing/2014/main" id="{3DC1B193-1C5D-4634-949C-A2CB8FE64E53}"/>
+                <a16:creationId xmlns:a16="http://schemas.microsoft.com/office/drawing/2014/main" id="{7DDFAC4D-5817-4760-8EB0-67F0C441B5A0}"/>
               </a:ext>
             </a:extLst>
           </p:cNvPr>
@@ -11256,7 +11456,7 @@
           <p:cNvPr id="7" name="">
             <a:extLst xmlns:a="http://schemas.openxmlformats.org/drawingml/2006/main">
               <a:ext uri="{FF2B5EF4-FFF2-40B4-BE49-F238E27FC236}">
-                <a16:creationId xmlns:a16="http://schemas.microsoft.com/office/drawing/2014/main" id="{625E438B-28D9-4592-8C65-FFB55BC196B5}"/>
+                <a16:creationId xmlns:a16="http://schemas.microsoft.com/office/drawing/2014/main" id="{342143E7-511B-4F34-AA16-7C67B1C2F196}"/>
               </a:ext>
             </a:extLst>
           </p:cNvPr>
@@ -11288,7 +11488,7 @@
           <p:cNvPr id="8" name="">
             <a:extLst xmlns:a="http://schemas.openxmlformats.org/drawingml/2006/main">
               <a:ext uri="{FF2B5EF4-FFF2-40B4-BE49-F238E27FC236}">
-                <a16:creationId xmlns:a16="http://schemas.microsoft.com/office/drawing/2014/main" id="{15AD36AA-5BBD-4FD1-9C21-C3F18FD11D59}"/>
+                <a16:creationId xmlns:a16="http://schemas.microsoft.com/office/drawing/2014/main" id="{B731D38E-6C5D-4C70-800C-F6C0FF02AC1E}"/>
               </a:ext>
             </a:extLst>
           </p:cNvPr>
@@ -11345,7 +11545,7 @@
           <p:cNvPr id="9" name="">
             <a:extLst xmlns:a="http://schemas.openxmlformats.org/drawingml/2006/main">
               <a:ext uri="{FF2B5EF4-FFF2-40B4-BE49-F238E27FC236}">
-                <a16:creationId xmlns:a16="http://schemas.microsoft.com/office/drawing/2014/main" id="{8960AF68-605B-4B01-AD6F-6BAEC3CAFE88}"/>
+                <a16:creationId xmlns:a16="http://schemas.microsoft.com/office/drawing/2014/main" id="{ED59279E-3EA8-4006-95FB-6B802DC273D2}"/>
               </a:ext>
             </a:extLst>
           </p:cNvPr>
@@ -11406,7 +11606,7 @@
           <p:nvPr/>
         </p:nvPicPr>
         <p:blipFill>
-          <a:blip xmlns:r="http://schemas.openxmlformats.org/officeDocument/2006/relationships" xmlns:a="http://schemas.openxmlformats.org/drawingml/2006/main" r:embed="Rce3e74c7927c4982"/>
+          <a:blip xmlns:r="http://schemas.openxmlformats.org/officeDocument/2006/relationships" xmlns:a="http://schemas.openxmlformats.org/drawingml/2006/main" r:embed="Ra7c2c06d318e4bb3"/>
           <a:stretch xmlns:a="http://schemas.openxmlformats.org/drawingml/2006/main"/>
         </p:blipFill>
         <p:spPr>
@@ -11424,7 +11624,7 @@
           <p:cNvPr id="11" name="">
             <a:extLst xmlns:a="http://schemas.openxmlformats.org/drawingml/2006/main">
               <a:ext uri="{FF2B5EF4-FFF2-40B4-BE49-F238E27FC236}">
-                <a16:creationId xmlns:a16="http://schemas.microsoft.com/office/drawing/2014/main" id="{C2F9B419-03D4-4781-84D3-7702389EF6BC}"/>
+                <a16:creationId xmlns:a16="http://schemas.microsoft.com/office/drawing/2014/main" id="{C03872A3-406F-43DD-9C0B-22D112B545D6}"/>
               </a:ext>
             </a:extLst>
           </p:cNvPr>
@@ -11481,7 +11681,7 @@
           <p:cNvPr id="12" name="">
             <a:extLst xmlns:a="http://schemas.openxmlformats.org/drawingml/2006/main">
               <a:ext uri="{FF2B5EF4-FFF2-40B4-BE49-F238E27FC236}">
-                <a16:creationId xmlns:a16="http://schemas.microsoft.com/office/drawing/2014/main" id="{409AFDF3-A833-4998-A2D2-E49A7BE9D06A}"/>
+                <a16:creationId xmlns:a16="http://schemas.microsoft.com/office/drawing/2014/main" id="{F40EC5E0-9349-4F22-9103-27A11F4A56F7}"/>
               </a:ext>
             </a:extLst>
           </p:cNvPr>
@@ -11538,7 +11738,7 @@
           <p:cNvPr id="13" name="">
             <a:extLst xmlns:a="http://schemas.openxmlformats.org/drawingml/2006/main">
               <a:ext uri="{FF2B5EF4-FFF2-40B4-BE49-F238E27FC236}">
-                <a16:creationId xmlns:a16="http://schemas.microsoft.com/office/drawing/2014/main" id="{9EA4FDD1-A075-41A9-9788-E01A957DE3AC}"/>
+                <a16:creationId xmlns:a16="http://schemas.microsoft.com/office/drawing/2014/main" id="{2DB3FE6C-2623-49C3-95C2-65E982DE2C2F}"/>
               </a:ext>
             </a:extLst>
           </p:cNvPr>
@@ -11570,7 +11770,7 @@
           <p:cNvPr id="14" name="">
             <a:extLst xmlns:a="http://schemas.openxmlformats.org/drawingml/2006/main">
               <a:ext uri="{FF2B5EF4-FFF2-40B4-BE49-F238E27FC236}">
-                <a16:creationId xmlns:a16="http://schemas.microsoft.com/office/drawing/2014/main" id="{4975F660-FF86-4AC6-B798-D077AE61C44F}"/>
+                <a16:creationId xmlns:a16="http://schemas.microsoft.com/office/drawing/2014/main" id="{4CF36963-5BD6-4150-96B7-99813E275513}"/>
               </a:ext>
             </a:extLst>
           </p:cNvPr>
@@ -11627,7 +11827,7 @@
           <p:cNvPr id="15" name="">
             <a:extLst xmlns:a="http://schemas.openxmlformats.org/drawingml/2006/main">
               <a:ext uri="{FF2B5EF4-FFF2-40B4-BE49-F238E27FC236}">
-                <a16:creationId xmlns:a16="http://schemas.microsoft.com/office/drawing/2014/main" id="{9C2842F7-6D4E-45EF-8071-E1DC4751C908}"/>
+                <a16:creationId xmlns:a16="http://schemas.microsoft.com/office/drawing/2014/main" id="{C4C9DD43-13A8-4312-8687-F43FC36B5DA4}"/>
               </a:ext>
             </a:extLst>
           </p:cNvPr>
@@ -11682,7 +11882,7 @@
     </p:spTree>
     <p:extLst>
       <p:ext uri="{BB962C8B-B14F-4D97-AF65-F5344CB8AC3E}">
-        <p14:creationId xmlns:p14="http://schemas.microsoft.com/office/powerpoint/2010/main" val="1193040939"/>
+        <p14:creationId xmlns:p14="http://schemas.microsoft.com/office/powerpoint/2010/main" val="1487771413"/>
       </p:ext>
     </p:extLst>
   </p:cSld>
@@ -11837,7 +12037,7 @@
           <p:cNvPr id="23" name="">
             <a:extLst xmlns:a="http://schemas.openxmlformats.org/drawingml/2006/main">
               <a:ext uri="{FF2B5EF4-FFF2-40B4-BE49-F238E27FC236}">
-                <a16:creationId xmlns:a16="http://schemas.microsoft.com/office/drawing/2014/main" id="{A4D96525-685A-44D0-B865-A818317FDB34}"/>
+                <a16:creationId xmlns:a16="http://schemas.microsoft.com/office/drawing/2014/main" id="{B8FC384F-5129-4557-AA02-DDA734F510AB}"/>
               </a:ext>
             </a:extLst>
           </p:cNvPr>
@@ -11869,7 +12069,7 @@
           <p:cNvPr id="2" name="">
             <a:extLst xmlns:a="http://schemas.openxmlformats.org/drawingml/2006/main">
               <a:ext uri="{FF2B5EF4-FFF2-40B4-BE49-F238E27FC236}">
-                <a16:creationId xmlns:a16="http://schemas.microsoft.com/office/drawing/2014/main" id="{35DEE65A-6F71-47F8-BA7D-153262E8BD59}"/>
+                <a16:creationId xmlns:a16="http://schemas.microsoft.com/office/drawing/2014/main" id="{B03CA7EA-C1A9-4426-9A1C-EB6FC5C40897}"/>
               </a:ext>
             </a:extLst>
           </p:cNvPr>
@@ -11926,7 +12126,7 @@
           <p:cNvPr id="3" name="">
             <a:extLst xmlns:a="http://schemas.openxmlformats.org/drawingml/2006/main">
               <a:ext uri="{FF2B5EF4-FFF2-40B4-BE49-F238E27FC236}">
-                <a16:creationId xmlns:a16="http://schemas.microsoft.com/office/drawing/2014/main" id="{C0B9C0A8-500A-47B5-A3C0-70D755D140CC}"/>
+                <a16:creationId xmlns:a16="http://schemas.microsoft.com/office/drawing/2014/main" id="{BD3C0297-8A62-46CF-B8A3-AE90195850B2}"/>
               </a:ext>
             </a:extLst>
           </p:cNvPr>
@@ -11958,7 +12158,7 @@
           <p:cNvPr id="4" name="">
             <a:extLst xmlns:a="http://schemas.openxmlformats.org/drawingml/2006/main">
               <a:ext uri="{FF2B5EF4-FFF2-40B4-BE49-F238E27FC236}">
-                <a16:creationId xmlns:a16="http://schemas.microsoft.com/office/drawing/2014/main" id="{932321FC-1867-4DDF-B340-4E8C72B73256}"/>
+                <a16:creationId xmlns:a16="http://schemas.microsoft.com/office/drawing/2014/main" id="{63F533AD-83DB-4BA3-93D4-38A1062B1DDE}"/>
               </a:ext>
             </a:extLst>
           </p:cNvPr>
@@ -12015,7 +12215,7 @@
           <p:cNvPr id="5" name="">
             <a:extLst xmlns:a="http://schemas.openxmlformats.org/drawingml/2006/main">
               <a:ext uri="{FF2B5EF4-FFF2-40B4-BE49-F238E27FC236}">
-                <a16:creationId xmlns:a16="http://schemas.microsoft.com/office/drawing/2014/main" id="{6C3026AC-3CEA-4B13-B1C7-A54256D5AAC6}"/>
+                <a16:creationId xmlns:a16="http://schemas.microsoft.com/office/drawing/2014/main" id="{B136701A-FD90-409F-B085-C26D2FD3BC8B}"/>
               </a:ext>
             </a:extLst>
           </p:cNvPr>
@@ -12072,7 +12272,7 @@
           <p:cNvPr id="6" name="">
             <a:extLst xmlns:a="http://schemas.openxmlformats.org/drawingml/2006/main">
               <a:ext uri="{FF2B5EF4-FFF2-40B4-BE49-F238E27FC236}">
-                <a16:creationId xmlns:a16="http://schemas.microsoft.com/office/drawing/2014/main" id="{A860FB3E-5A26-404F-8858-2DAD1B716DF6}"/>
+                <a16:creationId xmlns:a16="http://schemas.microsoft.com/office/drawing/2014/main" id="{FD553725-26B3-465B-8AB2-6E14FAC734A6}"/>
               </a:ext>
             </a:extLst>
           </p:cNvPr>
@@ -12129,7 +12329,7 @@
           <p:cNvPr id="7" name="">
             <a:extLst xmlns:a="http://schemas.openxmlformats.org/drawingml/2006/main">
               <a:ext uri="{FF2B5EF4-FFF2-40B4-BE49-F238E27FC236}">
-                <a16:creationId xmlns:a16="http://schemas.microsoft.com/office/drawing/2014/main" id="{86C01A82-8184-401B-8915-35BF1077A670}"/>
+                <a16:creationId xmlns:a16="http://schemas.microsoft.com/office/drawing/2014/main" id="{84A4E86A-42B9-4A57-AACF-50798922F7F5}"/>
               </a:ext>
             </a:extLst>
           </p:cNvPr>
@@ -12161,7 +12361,7 @@
           <p:cNvPr id="8" name="">
             <a:extLst xmlns:a="http://schemas.openxmlformats.org/drawingml/2006/main">
               <a:ext uri="{FF2B5EF4-FFF2-40B4-BE49-F238E27FC236}">
-                <a16:creationId xmlns:a16="http://schemas.microsoft.com/office/drawing/2014/main" id="{5C2AC3BE-9A84-41C3-9615-56AB196FFAB4}"/>
+                <a16:creationId xmlns:a16="http://schemas.microsoft.com/office/drawing/2014/main" id="{5FC5424F-5AF2-48BC-99A3-FB8E7ADCC389}"/>
               </a:ext>
             </a:extLst>
           </p:cNvPr>
@@ -12218,7 +12418,7 @@
           <p:cNvPr id="9" name="">
             <a:extLst xmlns:a="http://schemas.openxmlformats.org/drawingml/2006/main">
               <a:ext uri="{FF2B5EF4-FFF2-40B4-BE49-F238E27FC236}">
-                <a16:creationId xmlns:a16="http://schemas.microsoft.com/office/drawing/2014/main" id="{3AF403B1-E900-4EDA-B03E-D8E2C5CD0DCF}"/>
+                <a16:creationId xmlns:a16="http://schemas.microsoft.com/office/drawing/2014/main" id="{E396BC2B-0075-4D90-97FF-8E330A58B8B1}"/>
               </a:ext>
             </a:extLst>
           </p:cNvPr>
@@ -12275,7 +12475,7 @@
           <p:cNvPr id="10" name="">
             <a:extLst xmlns:a="http://schemas.openxmlformats.org/drawingml/2006/main">
               <a:ext uri="{FF2B5EF4-FFF2-40B4-BE49-F238E27FC236}">
-                <a16:creationId xmlns:a16="http://schemas.microsoft.com/office/drawing/2014/main" id="{DA3225DA-E831-43E7-8F9C-21BCE286CE49}"/>
+                <a16:creationId xmlns:a16="http://schemas.microsoft.com/office/drawing/2014/main" id="{606F330D-27E4-4B89-8572-09682A455639}"/>
               </a:ext>
             </a:extLst>
           </p:cNvPr>
@@ -12309,7 +12509,7 @@
           <p:cNvPr id="11" name="">
             <a:extLst xmlns:a="http://schemas.openxmlformats.org/drawingml/2006/main">
               <a:ext uri="{FF2B5EF4-FFF2-40B4-BE49-F238E27FC236}">
-                <a16:creationId xmlns:a16="http://schemas.microsoft.com/office/drawing/2014/main" id="{B929B9E6-1AA7-4B80-A252-EF87203D992C}"/>
+                <a16:creationId xmlns:a16="http://schemas.microsoft.com/office/drawing/2014/main" id="{5872B508-394F-4BF3-AAF0-32017CE23EA0}"/>
               </a:ext>
             </a:extLst>
           </p:cNvPr>
@@ -12341,7 +12541,7 @@
           <p:cNvPr id="12" name="">
             <a:extLst xmlns:a="http://schemas.openxmlformats.org/drawingml/2006/main">
               <a:ext uri="{FF2B5EF4-FFF2-40B4-BE49-F238E27FC236}">
-                <a16:creationId xmlns:a16="http://schemas.microsoft.com/office/drawing/2014/main" id="{8FA43B6B-E847-48D3-B724-B441A26020CE}"/>
+                <a16:creationId xmlns:a16="http://schemas.microsoft.com/office/drawing/2014/main" id="{C243C8A7-EDA5-4540-9E27-64DFC989084D}"/>
               </a:ext>
             </a:extLst>
           </p:cNvPr>
@@ -12398,7 +12598,7 @@
           <p:cNvPr id="13" name="">
             <a:extLst xmlns:a="http://schemas.openxmlformats.org/drawingml/2006/main">
               <a:ext uri="{FF2B5EF4-FFF2-40B4-BE49-F238E27FC236}">
-                <a16:creationId xmlns:a16="http://schemas.microsoft.com/office/drawing/2014/main" id="{F4BF603E-1513-4C5F-94F3-99A8769BB1C7}"/>
+                <a16:creationId xmlns:a16="http://schemas.microsoft.com/office/drawing/2014/main" id="{A0480AA8-4F0F-4CA5-8ED0-F551FDD8678F}"/>
               </a:ext>
             </a:extLst>
           </p:cNvPr>
@@ -12455,7 +12655,7 @@
           <p:cNvPr id="14" name="">
             <a:extLst xmlns:a="http://schemas.openxmlformats.org/drawingml/2006/main">
               <a:ext uri="{FF2B5EF4-FFF2-40B4-BE49-F238E27FC236}">
-                <a16:creationId xmlns:a16="http://schemas.microsoft.com/office/drawing/2014/main" id="{113573A8-BA5D-4D08-8CBC-DEDFC779B4DE}"/>
+                <a16:creationId xmlns:a16="http://schemas.microsoft.com/office/drawing/2014/main" id="{8CE35AE5-41A2-47EF-AC71-A2A56FD5586C}"/>
               </a:ext>
             </a:extLst>
           </p:cNvPr>
@@ -12489,7 +12689,7 @@
           <p:cNvPr id="15" name="">
             <a:extLst xmlns:a="http://schemas.openxmlformats.org/drawingml/2006/main">
               <a:ext uri="{FF2B5EF4-FFF2-40B4-BE49-F238E27FC236}">
-                <a16:creationId xmlns:a16="http://schemas.microsoft.com/office/drawing/2014/main" id="{1DB46B89-B434-43F0-8C72-3F3D822AB9B8}"/>
+                <a16:creationId xmlns:a16="http://schemas.microsoft.com/office/drawing/2014/main" id="{6F208DD6-40EB-45B6-A869-B92F1BCADE75}"/>
               </a:ext>
             </a:extLst>
           </p:cNvPr>
@@ -12521,7 +12721,7 @@
           <p:cNvPr id="16" name="">
             <a:extLst xmlns:a="http://schemas.openxmlformats.org/drawingml/2006/main">
               <a:ext uri="{FF2B5EF4-FFF2-40B4-BE49-F238E27FC236}">
-                <a16:creationId xmlns:a16="http://schemas.microsoft.com/office/drawing/2014/main" id="{506C3DE6-F121-4DDA-8ABA-564BA78D382A}"/>
+                <a16:creationId xmlns:a16="http://schemas.microsoft.com/office/drawing/2014/main" id="{DA08E888-C395-4CD3-94C0-C9CD550CE467}"/>
               </a:ext>
             </a:extLst>
           </p:cNvPr>
@@ -12578,7 +12778,7 @@
           <p:cNvPr id="17" name="">
             <a:extLst xmlns:a="http://schemas.openxmlformats.org/drawingml/2006/main">
               <a:ext uri="{FF2B5EF4-FFF2-40B4-BE49-F238E27FC236}">
-                <a16:creationId xmlns:a16="http://schemas.microsoft.com/office/drawing/2014/main" id="{777EDBFC-444B-411F-8F79-CF435B11B32E}"/>
+                <a16:creationId xmlns:a16="http://schemas.microsoft.com/office/drawing/2014/main" id="{F97C8D11-E831-4BE6-8F55-56F606447DAE}"/>
               </a:ext>
             </a:extLst>
           </p:cNvPr>
@@ -12635,7 +12835,7 @@
           <p:cNvPr id="18" name="">
             <a:extLst xmlns:a="http://schemas.openxmlformats.org/drawingml/2006/main">
               <a:ext uri="{FF2B5EF4-FFF2-40B4-BE49-F238E27FC236}">
-                <a16:creationId xmlns:a16="http://schemas.microsoft.com/office/drawing/2014/main" id="{000D37E5-5EC4-468A-BBF9-E5CA176A7B46}"/>
+                <a16:creationId xmlns:a16="http://schemas.microsoft.com/office/drawing/2014/main" id="{16EF7099-9879-4DEA-BAE1-F9DFA02FEF33}"/>
               </a:ext>
             </a:extLst>
           </p:cNvPr>
@@ -12669,7 +12869,7 @@
           <p:cNvPr id="19" name="">
             <a:extLst xmlns:a="http://schemas.openxmlformats.org/drawingml/2006/main">
               <a:ext uri="{FF2B5EF4-FFF2-40B4-BE49-F238E27FC236}">
-                <a16:creationId xmlns:a16="http://schemas.microsoft.com/office/drawing/2014/main" id="{4055973A-DDBD-44ED-95AB-7EB18FFEB325}"/>
+                <a16:creationId xmlns:a16="http://schemas.microsoft.com/office/drawing/2014/main" id="{16BD818C-EF32-46DE-AF1C-660E9C44F990}"/>
               </a:ext>
             </a:extLst>
           </p:cNvPr>
@@ -12701,7 +12901,7 @@
           <p:cNvPr id="20" name="">
             <a:extLst xmlns:a="http://schemas.openxmlformats.org/drawingml/2006/main">
               <a:ext uri="{FF2B5EF4-FFF2-40B4-BE49-F238E27FC236}">
-                <a16:creationId xmlns:a16="http://schemas.microsoft.com/office/drawing/2014/main" id="{B12163A9-2584-41C0-B73A-0E1893A344D2}"/>
+                <a16:creationId xmlns:a16="http://schemas.microsoft.com/office/drawing/2014/main" id="{93EE9EE7-19B5-436F-A438-E82A06BD2B90}"/>
               </a:ext>
             </a:extLst>
           </p:cNvPr>
@@ -12758,7 +12958,7 @@
           <p:cNvPr id="21" name="">
             <a:extLst xmlns:a="http://schemas.openxmlformats.org/drawingml/2006/main">
               <a:ext uri="{FF2B5EF4-FFF2-40B4-BE49-F238E27FC236}">
-                <a16:creationId xmlns:a16="http://schemas.microsoft.com/office/drawing/2014/main" id="{62DB3543-578E-4073-85A5-3DF3C1961368}"/>
+                <a16:creationId xmlns:a16="http://schemas.microsoft.com/office/drawing/2014/main" id="{41BDA85D-711D-4A80-807B-08AD0A45C1D1}"/>
               </a:ext>
             </a:extLst>
           </p:cNvPr>
@@ -12815,7 +13015,7 @@
           <p:cNvPr id="22" name="">
             <a:extLst xmlns:a="http://schemas.openxmlformats.org/drawingml/2006/main">
               <a:ext uri="{FF2B5EF4-FFF2-40B4-BE49-F238E27FC236}">
-                <a16:creationId xmlns:a16="http://schemas.microsoft.com/office/drawing/2014/main" id="{DBD73F4F-7109-4AC3-8BD6-202B31008B74}"/>
+                <a16:creationId xmlns:a16="http://schemas.microsoft.com/office/drawing/2014/main" id="{0E3E74E5-9845-4569-9A0C-50222F40D0FF}"/>
               </a:ext>
             </a:extLst>
           </p:cNvPr>
@@ -12870,7 +13070,7 @@
     </p:spTree>
     <p:extLst>
       <p:ext uri="{BB962C8B-B14F-4D97-AF65-F5344CB8AC3E}">
-        <p14:creationId xmlns:p14="http://schemas.microsoft.com/office/powerpoint/2010/main" val="36276736"/>
+        <p14:creationId xmlns:p14="http://schemas.microsoft.com/office/powerpoint/2010/main" val="1908877715"/>
       </p:ext>
     </p:extLst>
   </p:cSld>
@@ -13071,7 +13271,7 @@
           <p:cNvPr id="22" name="">
             <a:extLst xmlns:a="http://schemas.openxmlformats.org/drawingml/2006/main">
               <a:ext uri="{FF2B5EF4-FFF2-40B4-BE49-F238E27FC236}">
-                <a16:creationId xmlns:a16="http://schemas.microsoft.com/office/drawing/2014/main" id="{BA8F0D19-C5A1-45B1-BD95-9F9685652E67}"/>
+                <a16:creationId xmlns:a16="http://schemas.microsoft.com/office/drawing/2014/main" id="{6CFA7C2A-789A-4B71-BA07-1510D6C2F6A1}"/>
               </a:ext>
             </a:extLst>
           </p:cNvPr>
@@ -13103,7 +13303,7 @@
           <p:cNvPr id="2" name="">
             <a:extLst xmlns:a="http://schemas.openxmlformats.org/drawingml/2006/main">
               <a:ext uri="{FF2B5EF4-FFF2-40B4-BE49-F238E27FC236}">
-                <a16:creationId xmlns:a16="http://schemas.microsoft.com/office/drawing/2014/main" id="{94777835-B908-46F2-9196-0D33F6144B08}"/>
+                <a16:creationId xmlns:a16="http://schemas.microsoft.com/office/drawing/2014/main" id="{A3D2E23F-3C66-4A7E-AE2A-8D57BA41CB83}"/>
               </a:ext>
             </a:extLst>
           </p:cNvPr>
@@ -13160,7 +13360,7 @@
           <p:cNvPr id="3" name="">
             <a:extLst xmlns:a="http://schemas.openxmlformats.org/drawingml/2006/main">
               <a:ext uri="{FF2B5EF4-FFF2-40B4-BE49-F238E27FC236}">
-                <a16:creationId xmlns:a16="http://schemas.microsoft.com/office/drawing/2014/main" id="{14DA1BFF-769B-46DF-A89D-9A0163061ACA}"/>
+                <a16:creationId xmlns:a16="http://schemas.microsoft.com/office/drawing/2014/main" id="{46F1ACBD-29AB-4607-8E24-48795CDFF49D}"/>
               </a:ext>
             </a:extLst>
           </p:cNvPr>
@@ -13192,7 +13392,7 @@
           <p:cNvPr id="4" name="">
             <a:extLst xmlns:a="http://schemas.openxmlformats.org/drawingml/2006/main">
               <a:ext uri="{FF2B5EF4-FFF2-40B4-BE49-F238E27FC236}">
-                <a16:creationId xmlns:a16="http://schemas.microsoft.com/office/drawing/2014/main" id="{5E4B1963-4BDA-4F7E-AB3A-E98628EE3D97}"/>
+                <a16:creationId xmlns:a16="http://schemas.microsoft.com/office/drawing/2014/main" id="{38DB1A51-C044-4603-8F9B-CAD30AE1F525}"/>
               </a:ext>
             </a:extLst>
           </p:cNvPr>
@@ -13249,7 +13449,7 @@
           <p:cNvPr id="5" name="">
             <a:extLst xmlns:a="http://schemas.openxmlformats.org/drawingml/2006/main">
               <a:ext uri="{FF2B5EF4-FFF2-40B4-BE49-F238E27FC236}">
-                <a16:creationId xmlns:a16="http://schemas.microsoft.com/office/drawing/2014/main" id="{56A2E6C7-3875-40C4-9101-BFADE544AC72}"/>
+                <a16:creationId xmlns:a16="http://schemas.microsoft.com/office/drawing/2014/main" id="{EA0DFEDE-87AA-457F-B659-F9A17AB299F7}"/>
               </a:ext>
             </a:extLst>
           </p:cNvPr>
@@ -13306,7 +13506,7 @@
           <p:cNvPr id="6" name="">
             <a:extLst xmlns:a="http://schemas.openxmlformats.org/drawingml/2006/main">
               <a:ext uri="{FF2B5EF4-FFF2-40B4-BE49-F238E27FC236}">
-                <a16:creationId xmlns:a16="http://schemas.microsoft.com/office/drawing/2014/main" id="{0A2BF82C-AFF2-4E0A-A5C6-B197F85026F5}"/>
+                <a16:creationId xmlns:a16="http://schemas.microsoft.com/office/drawing/2014/main" id="{3C1D9E5D-209F-4326-8448-900BE9564F2C}"/>
               </a:ext>
             </a:extLst>
           </p:cNvPr>
@@ -13363,7 +13563,7 @@
           <p:cNvPr id="7" name="">
             <a:extLst xmlns:a="http://schemas.openxmlformats.org/drawingml/2006/main">
               <a:ext uri="{FF2B5EF4-FFF2-40B4-BE49-F238E27FC236}">
-                <a16:creationId xmlns:a16="http://schemas.microsoft.com/office/drawing/2014/main" id="{D553DCA7-D8F7-4FA1-BF59-0FF75B822BF0}"/>
+                <a16:creationId xmlns:a16="http://schemas.microsoft.com/office/drawing/2014/main" id="{704BCCA9-9097-4EBF-93AD-968F53A397E4}"/>
               </a:ext>
             </a:extLst>
           </p:cNvPr>
@@ -13395,7 +13595,7 @@
           <p:cNvPr id="8" name="">
             <a:extLst xmlns:a="http://schemas.openxmlformats.org/drawingml/2006/main">
               <a:ext uri="{FF2B5EF4-FFF2-40B4-BE49-F238E27FC236}">
-                <a16:creationId xmlns:a16="http://schemas.microsoft.com/office/drawing/2014/main" id="{BFD10A2E-4F25-455A-ACF9-15EA1D208969}"/>
+                <a16:creationId xmlns:a16="http://schemas.microsoft.com/office/drawing/2014/main" id="{824A949F-8430-4C7D-ABC2-AFEF1E1049C1}"/>
               </a:ext>
             </a:extLst>
           </p:cNvPr>
@@ -13452,7 +13652,7 @@
           <p:cNvPr id="9" name="">
             <a:extLst xmlns:a="http://schemas.openxmlformats.org/drawingml/2006/main">
               <a:ext uri="{FF2B5EF4-FFF2-40B4-BE49-F238E27FC236}">
-                <a16:creationId xmlns:a16="http://schemas.microsoft.com/office/drawing/2014/main" id="{3916C82D-EC8E-4B35-8E4F-48DA3F9FDBDE}"/>
+                <a16:creationId xmlns:a16="http://schemas.microsoft.com/office/drawing/2014/main" id="{60FBAC21-1188-4BC6-A71C-2D4559311B47}"/>
               </a:ext>
             </a:extLst>
           </p:cNvPr>
@@ -13509,7 +13709,7 @@
           <p:cNvPr id="10" name="">
             <a:extLst xmlns:a="http://schemas.openxmlformats.org/drawingml/2006/main">
               <a:ext uri="{FF2B5EF4-FFF2-40B4-BE49-F238E27FC236}">
-                <a16:creationId xmlns:a16="http://schemas.microsoft.com/office/drawing/2014/main" id="{890B583A-A624-4060-8F5F-1553A9A9598C}"/>
+                <a16:creationId xmlns:a16="http://schemas.microsoft.com/office/drawing/2014/main" id="{5C5AA30E-AAE1-4451-9617-56DEF43E1752}"/>
               </a:ext>
             </a:extLst>
           </p:cNvPr>
@@ -13543,7 +13743,7 @@
           <p:cNvPr id="11" name="">
             <a:extLst xmlns:a="http://schemas.openxmlformats.org/drawingml/2006/main">
               <a:ext uri="{FF2B5EF4-FFF2-40B4-BE49-F238E27FC236}">
-                <a16:creationId xmlns:a16="http://schemas.microsoft.com/office/drawing/2014/main" id="{8501C563-6ED2-451A-B7C6-EE214B871E07}"/>
+                <a16:creationId xmlns:a16="http://schemas.microsoft.com/office/drawing/2014/main" id="{C4FA61EE-5B1B-4D03-95E3-A78938331A4E}"/>
               </a:ext>
             </a:extLst>
           </p:cNvPr>
@@ -13575,7 +13775,7 @@
           <p:cNvPr id="12" name="">
             <a:extLst xmlns:a="http://schemas.openxmlformats.org/drawingml/2006/main">
               <a:ext uri="{FF2B5EF4-FFF2-40B4-BE49-F238E27FC236}">
-                <a16:creationId xmlns:a16="http://schemas.microsoft.com/office/drawing/2014/main" id="{D4FBF8FB-8EBF-4EFE-ACA7-EFDC14626678}"/>
+                <a16:creationId xmlns:a16="http://schemas.microsoft.com/office/drawing/2014/main" id="{3B62C8D4-0031-4511-8BC3-AE18BA1EDB73}"/>
               </a:ext>
             </a:extLst>
           </p:cNvPr>
@@ -13632,7 +13832,7 @@
           <p:cNvPr id="13" name="">
             <a:extLst xmlns:a="http://schemas.openxmlformats.org/drawingml/2006/main">
               <a:ext uri="{FF2B5EF4-FFF2-40B4-BE49-F238E27FC236}">
-                <a16:creationId xmlns:a16="http://schemas.microsoft.com/office/drawing/2014/main" id="{0D7416A1-4F5F-45D1-B65A-379B811A0C0E}"/>
+                <a16:creationId xmlns:a16="http://schemas.microsoft.com/office/drawing/2014/main" id="{5A70560E-5964-4324-BCA8-C5BC4E0E7B13}"/>
               </a:ext>
             </a:extLst>
           </p:cNvPr>
@@ -13689,7 +13889,7 @@
           <p:cNvPr id="14" name="">
             <a:extLst xmlns:a="http://schemas.openxmlformats.org/drawingml/2006/main">
               <a:ext uri="{FF2B5EF4-FFF2-40B4-BE49-F238E27FC236}">
-                <a16:creationId xmlns:a16="http://schemas.microsoft.com/office/drawing/2014/main" id="{10C61386-0C1C-40AA-8FEB-17A8548440D8}"/>
+                <a16:creationId xmlns:a16="http://schemas.microsoft.com/office/drawing/2014/main" id="{F7B475AC-78C3-4C3A-91DB-B976A9CE1B98}"/>
               </a:ext>
             </a:extLst>
           </p:cNvPr>
@@ -13723,7 +13923,7 @@
           <p:cNvPr id="15" name="">
             <a:extLst xmlns:a="http://schemas.openxmlformats.org/drawingml/2006/main">
               <a:ext uri="{FF2B5EF4-FFF2-40B4-BE49-F238E27FC236}">
-                <a16:creationId xmlns:a16="http://schemas.microsoft.com/office/drawing/2014/main" id="{24A24A52-E77B-4E6D-BD69-04B2E7CB5DDA}"/>
+                <a16:creationId xmlns:a16="http://schemas.microsoft.com/office/drawing/2014/main" id="{3333020B-D01D-4225-8CAD-458E56E37A73}"/>
               </a:ext>
             </a:extLst>
           </p:cNvPr>
@@ -13755,7 +13955,7 @@
           <p:cNvPr id="16" name="">
             <a:extLst xmlns:a="http://schemas.openxmlformats.org/drawingml/2006/main">
               <a:ext uri="{FF2B5EF4-FFF2-40B4-BE49-F238E27FC236}">
-                <a16:creationId xmlns:a16="http://schemas.microsoft.com/office/drawing/2014/main" id="{1C025DF1-3DB8-42DD-AE5A-112181737433}"/>
+                <a16:creationId xmlns:a16="http://schemas.microsoft.com/office/drawing/2014/main" id="{28FEBB2C-BE4F-4982-A4AB-F1CF76DDC289}"/>
               </a:ext>
             </a:extLst>
           </p:cNvPr>
@@ -13812,7 +14012,7 @@
           <p:cNvPr id="17" name="">
             <a:extLst xmlns:a="http://schemas.openxmlformats.org/drawingml/2006/main">
               <a:ext uri="{FF2B5EF4-FFF2-40B4-BE49-F238E27FC236}">
-                <a16:creationId xmlns:a16="http://schemas.microsoft.com/office/drawing/2014/main" id="{3613A42F-A326-4B4E-8F36-0AEEEDD0AB23}"/>
+                <a16:creationId xmlns:a16="http://schemas.microsoft.com/office/drawing/2014/main" id="{485C52D6-B300-4C94-ABA5-C30FCA645522}"/>
               </a:ext>
             </a:extLst>
           </p:cNvPr>
@@ -13869,7 +14069,7 @@
           <p:cNvPr id="18" name="">
             <a:extLst xmlns:a="http://schemas.openxmlformats.org/drawingml/2006/main">
               <a:ext uri="{FF2B5EF4-FFF2-40B4-BE49-F238E27FC236}">
-                <a16:creationId xmlns:a16="http://schemas.microsoft.com/office/drawing/2014/main" id="{0F4A7A18-DA4E-41F0-B6BC-F2EE6478D17E}"/>
+                <a16:creationId xmlns:a16="http://schemas.microsoft.com/office/drawing/2014/main" id="{8683EB56-BD5B-4BEA-B20A-532E192502CA}"/>
               </a:ext>
             </a:extLst>
           </p:cNvPr>
@@ -13903,7 +14103,7 @@
           <p:cNvPr id="19" name="">
             <a:extLst xmlns:a="http://schemas.openxmlformats.org/drawingml/2006/main">
               <a:ext uri="{FF2B5EF4-FFF2-40B4-BE49-F238E27FC236}">
-                <a16:creationId xmlns:a16="http://schemas.microsoft.com/office/drawing/2014/main" id="{1B5B01F3-6D32-46B2-B07E-0189E3E57DA4}"/>
+                <a16:creationId xmlns:a16="http://schemas.microsoft.com/office/drawing/2014/main" id="{2ECA1A1D-CFAD-4BD3-8BEC-99C79E804225}"/>
               </a:ext>
             </a:extLst>
           </p:cNvPr>
@@ -13935,7 +14135,7 @@
           <p:cNvPr id="20" name="">
             <a:extLst xmlns:a="http://schemas.openxmlformats.org/drawingml/2006/main">
               <a:ext uri="{FF2B5EF4-FFF2-40B4-BE49-F238E27FC236}">
-                <a16:creationId xmlns:a16="http://schemas.microsoft.com/office/drawing/2014/main" id="{38FE28C5-7FA6-41BC-9145-E6558CEA26BA}"/>
+                <a16:creationId xmlns:a16="http://schemas.microsoft.com/office/drawing/2014/main" id="{0B15025F-0E7C-4C29-818F-83B25A6F8453}"/>
               </a:ext>
             </a:extLst>
           </p:cNvPr>
@@ -13992,7 +14192,7 @@
           <p:cNvPr id="21" name="">
             <a:extLst xmlns:a="http://schemas.openxmlformats.org/drawingml/2006/main">
               <a:ext uri="{FF2B5EF4-FFF2-40B4-BE49-F238E27FC236}">
-                <a16:creationId xmlns:a16="http://schemas.microsoft.com/office/drawing/2014/main" id="{8690FDC3-29DD-493F-B046-6AB9DF9EB09F}"/>
+                <a16:creationId xmlns:a16="http://schemas.microsoft.com/office/drawing/2014/main" id="{6FA3743B-4147-4B8A-93D9-1A1A24EBCA32}"/>
               </a:ext>
             </a:extLst>
           </p:cNvPr>
@@ -14047,7 +14247,7 @@
     </p:spTree>
     <p:extLst>
       <p:ext uri="{BB962C8B-B14F-4D97-AF65-F5344CB8AC3E}">
-        <p14:creationId xmlns:p14="http://schemas.microsoft.com/office/powerpoint/2010/main" val="1760189274"/>
+        <p14:creationId xmlns:p14="http://schemas.microsoft.com/office/powerpoint/2010/main" val="218006603"/>
       </p:ext>
     </p:extLst>
   </p:cSld>
